--- a/slides/pptx/week11.pptx
+++ b/slides/pptx/week11.pptx
@@ -19,9 +19,13 @@
     <p:sldId id="267" r:id="rId13"/>
     <p:sldId id="268" r:id="rId14"/>
     <p:sldId id="269" r:id="rId15"/>
+    <p:sldId id="270" r:id="rId16"/>
+    <p:sldId id="271" r:id="rId17"/>
+    <p:sldId id="272" r:id="rId18"/>
+    <p:sldId id="273" r:id="rId19"/>
   </p:sldIdLst>
   <p:notesMasterIdLst>
-    <p:notesMasterId r:id="rId16"/>
+    <p:notesMasterId r:id="rId20"/>
   </p:notesMasterIdLst>
   <p:sldSz cx="9144000" cy="5143500"/>
   <p:notesSz cx="5143500" cy="9144000"/>
@@ -603,7 +607,7 @@
           <a:p>
             <a:r>
               <a:rPr lang="en-US" dirty="0"/>
-              <a:t>The thesis of the week. Mitigations are a treadmill; memory-safe languages END the bug class. Rust's borrow checker makes UAF a compile error, not a CVE. This is exactly where industry + government are steering. ~4 min.</a:t>
+              <a:t>Walk the exploit method. Cyclic pattern (De Bruijn) tells you exactly how many bytes for THIS specific build — stress that 72 is a fact about the unhardened binary, not a fact about the bug; the sim/exploit-chain diagram shows this shift explicitly. Then overwrite it with the address of win(). Format string: %x leaks stack, %n writes — a primitive most students haven't seen. This is round 2 (pwn). ~6 min.</a:t>
             </a:r>
             <a:endParaRPr lang="en-US" dirty="0"/>
           </a:p>
@@ -691,7 +695,7 @@
           <a:p>
             <a:r>
               <a:rPr lang="en-US" dirty="0"/>
-              <a:t>Explain the 3 rounds before lab. Round 1 = instant feedback (it crashes or not). Round 3 (defend + Rust rewrite) is graded and the real lesson. The weekly quiz no longer asks for the crashing input/defense/flag (dropped — quiz runs before the lab) — that's required in the worksheet instead. ~3 min.</a:t>
+              <a:t>THE key correction this slide needed: FORTIFY_SOURCE checks at the copy call, before the function even returns — so on the hardened build it always wins the race against the canary, which only checks at return time. This lab's own interactive sim literally calls "the canary detects it" the week's most reliable wrong answer — don't teach it. NX is a real mitigation but not for THIS exploit (ret2win, no injected shellcode) — say so explicitly rather than implying all four defenses equally harden the one attack just demonstrated. Worksheet Q4 grades naming all four (canary/PIE/NX/FORTIFY) + what each defeats — FORTIFY must be on this slide. ~5 min.</a:t>
             </a:r>
             <a:endParaRPr lang="en-US" dirty="0"/>
           </a:p>
@@ -779,7 +783,8 @@
           <a:p>
             <a:r>
               <a:rPr lang="en-US" dirty="0"/>
-              <a:t>The Rust rewrite + "why it's now impossible" is the key deliverable — it proves they understand the cure, not just the exploit. AI-resilient tasks count.</a:t>
+              <a:t>Walk it top to bottom exactly once — this is the whole week's argument as one picture: which mitigation actually stops THIS exploit, and in what order they'd fire if more than one were present. Land on the same correction as the last slide: FORTIFY wins the race against the canary, every time, on this build. ~4 min.
+Diagram: A vertical attack chain from fuzzing finding the crash, to the unchecked strcpy overflow, to the overwritten return address, to a ret2win shell. Three mitigations cut this chain at different links: FORTIFY_SOURCE aborts at copy time, before any overwrite — this hardened build traps here, which students often misread as the canary. The stack canary only detects the smash at return, after the copy already happened. ASLR/PIE randomizes addresses so the fixed win() address is wrong. NX/DEP stops the OTHER exploitation path (injected shellcode), not this one.</a:t>
             </a:r>
             <a:endParaRPr lang="en-US" dirty="0"/>
           </a:p>
@@ -867,7 +872,8 @@
           <a:p>
             <a:r>
               <a:rPr lang="en-US" dirty="0"/>
-              <a:t>Recap. Cold-call: "why aren't stack canaries enough?" (they detect, don't prevent; bypassable via leaks — the cure is memory safety). ~2 min.</a:t>
+              <a:t>The thesis of the week. Mitigations are a treadmill; memory-safe languages END the bug class. Rust's borrow checker makes UAF a compile error, not a CVE. This is exactly where industry + government are steering. ~4 min.
+Diagram: Two columns contrasting how C/C++ and memory-safe languages treat the same bug family. In C/C++ you manage memory by hand with no automatic checks, so a whole family is possible — buffer overflow (CWE-121), out-of-bounds write (CWE-787), use-after-free, format string (CWE-134) — and the mitigations (canary, ASLR, PIE, NX, FORTIFY) only raise the cost of exploiting the bug while the bug still compiles and ships, a treadmill where the class never goes away. In Rust/Go the language manages memory for you: the borrow checker enforces lifetimes and arrays are bounds-checked, so an overflow or use-after-free becomes a compile error or a safe panic — the class is removed, not patched, because the unsafe write never reaches the machine. Mitigations are a treadmill; a memory-safe language ends the race, which is why CISA Secure by Design and the US ONCD both call for moving off C/C++ for new code.</a:t>
             </a:r>
             <a:endParaRPr lang="en-US" dirty="0"/>
           </a:p>
@@ -955,7 +961,8 @@
           <a:p>
             <a:r>
               <a:rPr lang="en-US" dirty="0"/>
-              <a:t>Cliffhanger: "Next week — one poisoned dependency owns thousands of victims; we'll replay xz and SolarWinds-style attacks."</a:t>
+              <a:t>The thesis of the week. Mitigations are a treadmill; memory-safe languages END the bug class. Rust's borrow checker makes UAF a compile error, not a CVE. This is exactly where industry + government are steering. ~4 min.
+Diagram: Two columns contrasting how C/C++ and memory-safe languages treat the same bug family. In C/C++ you manage memory by hand with no automatic checks, so a whole family is possible — buffer overflow (CWE-121), out-of-bounds write (CWE-787), use-after-free, format string (CWE-134) — and the mitigations (canary, ASLR, PIE, NX, FORTIFY) only raise the cost of exploiting the bug while the bug still compiles and ships, a treadmill where the class never goes away. In Rust/Go the language manages memory for you: the borrow checker enforces lifetimes and arrays are bounds-checked, so an overflow or use-after-free becomes a compile error or a safe panic — the class is removed, not patched, because the unsafe write never reaches the machine. Mitigations are a treadmill; a memory-safe language ends the race, which is why CISA Secure by Design and the US ONCD both call for moving off C/C++ for new code.</a:t>
             </a:r>
             <a:endParaRPr lang="en-US" dirty="0"/>
           </a:p>
@@ -979,6 +986,358 @@
             <a:fld id="{F7021451-1387-4CA6-816F-3879F97B5CBC}" type="slidenum">
               <a:rPr lang="en-US"/>
               <a:t>14</a:t>
+            </a:fld>
+            <a:endParaRPr lang="en-US"/>
+          </a:p>
+        </p:txBody>
+      </p:sp>
+    </p:spTree>
+    <p:extLst>
+      <p:ext uri="{BB962C8B-B14F-4D97-AF65-F5344CB8AC3E}">
+        <p14:creationId xmlns:p14="http://schemas.microsoft.com/office/powerpoint/2010/main" val="1024086991"/>
+      </p:ext>
+    </p:extLst>
+  </p:cSld>
+  <p:clrMapOvr>
+    <a:masterClrMapping/>
+  </p:clrMapOvr>
+</p:notes>
+</file>
+
+<file path=ppt/notesSlides/notesSlide15.xml><?xml version="1.0" encoding="utf-8"?>
+<p:notes xmlns:a="http://schemas.openxmlformats.org/drawingml/2006/main" xmlns:r="http://schemas.openxmlformats.org/officeDocument/2006/relationships" xmlns:p="http://schemas.openxmlformats.org/presentationml/2006/main">
+  <p:cSld>
+    <p:spTree>
+      <p:nvGrpSpPr>
+        <p:cNvPr id="1" name=""/>
+        <p:cNvGrpSpPr/>
+        <p:nvPr/>
+      </p:nvGrpSpPr>
+      <p:grpSpPr>
+        <a:xfrm>
+          <a:off x="0" y="0"/>
+          <a:ext cx="0" cy="0"/>
+          <a:chOff x="0" y="0"/>
+          <a:chExt cx="0" cy="0"/>
+        </a:xfrm>
+      </p:grpSpPr>
+      <p:sp>
+        <p:nvSpPr>
+          <p:cNvPr id="2" name="Slide Image Placeholder 1"/>
+          <p:cNvSpPr>
+            <a:spLocks noGrp="1" noRot="1" noChangeAspect="1"/>
+          </p:cNvSpPr>
+          <p:nvPr>
+            <p:ph type="sldImg"/>
+          </p:nvPr>
+        </p:nvSpPr>
+        <p:spPr/>
+      </p:sp>
+      <p:sp>
+        <p:nvSpPr>
+          <p:cNvPr id="3" name="Notes Placeholder 2"/>
+          <p:cNvSpPr>
+            <a:spLocks noGrp="1"/>
+          </p:cNvSpPr>
+          <p:nvPr>
+            <p:ph type="body" idx="1"/>
+          </p:nvPr>
+        </p:nvSpPr>
+        <p:spPr/>
+        <p:txBody>
+          <a:bodyPr/>
+          <a:lstStyle/>
+          <a:p>
+            <a:r>
+              <a:rPr lang="en-US" dirty="0"/>
+              <a:t>Explain the 3 rounds before lab. Round 1 = instant feedback (it crashes or not). Round 3 (defend + Rust rewrite) is graded and the real lesson. The weekly quiz no longer asks for the crashing input/defense/flag (dropped — quiz runs before the lab) — that's required in the worksheet instead. ~3 min.</a:t>
+            </a:r>
+            <a:endParaRPr lang="en-US" dirty="0"/>
+          </a:p>
+        </p:txBody>
+      </p:sp>
+      <p:sp>
+        <p:nvSpPr>
+          <p:cNvPr id="4" name="Slide Number Placeholder 3"/>
+          <p:cNvSpPr>
+            <a:spLocks noGrp="1"/>
+          </p:cNvSpPr>
+          <p:nvPr>
+            <p:ph type="sldNum" sz="quarter" idx="10"/>
+          </p:nvPr>
+        </p:nvSpPr>
+        <p:spPr/>
+        <p:txBody>
+          <a:bodyPr/>
+          <a:lstStyle/>
+          <a:p>
+            <a:fld id="{F7021451-1387-4CA6-816F-3879F97B5CBC}" type="slidenum">
+              <a:rPr lang="en-US"/>
+              <a:t>15</a:t>
+            </a:fld>
+            <a:endParaRPr lang="en-US"/>
+          </a:p>
+        </p:txBody>
+      </p:sp>
+    </p:spTree>
+    <p:extLst>
+      <p:ext uri="{BB962C8B-B14F-4D97-AF65-F5344CB8AC3E}">
+        <p14:creationId xmlns:p14="http://schemas.microsoft.com/office/powerpoint/2010/main" val="1024086991"/>
+      </p:ext>
+    </p:extLst>
+  </p:cSld>
+  <p:clrMapOvr>
+    <a:masterClrMapping/>
+  </p:clrMapOvr>
+</p:notes>
+</file>
+
+<file path=ppt/notesSlides/notesSlide16.xml><?xml version="1.0" encoding="utf-8"?>
+<p:notes xmlns:a="http://schemas.openxmlformats.org/drawingml/2006/main" xmlns:r="http://schemas.openxmlformats.org/officeDocument/2006/relationships" xmlns:p="http://schemas.openxmlformats.org/presentationml/2006/main">
+  <p:cSld>
+    <p:spTree>
+      <p:nvGrpSpPr>
+        <p:cNvPr id="1" name=""/>
+        <p:cNvGrpSpPr/>
+        <p:nvPr/>
+      </p:nvGrpSpPr>
+      <p:grpSpPr>
+        <a:xfrm>
+          <a:off x="0" y="0"/>
+          <a:ext cx="0" cy="0"/>
+          <a:chOff x="0" y="0"/>
+          <a:chExt cx="0" cy="0"/>
+        </a:xfrm>
+      </p:grpSpPr>
+      <p:sp>
+        <p:nvSpPr>
+          <p:cNvPr id="2" name="Slide Image Placeholder 1"/>
+          <p:cNvSpPr>
+            <a:spLocks noGrp="1" noRot="1" noChangeAspect="1"/>
+          </p:cNvSpPr>
+          <p:nvPr>
+            <p:ph type="sldImg"/>
+          </p:nvPr>
+        </p:nvSpPr>
+        <p:spPr/>
+      </p:sp>
+      <p:sp>
+        <p:nvSpPr>
+          <p:cNvPr id="3" name="Notes Placeholder 2"/>
+          <p:cNvSpPr>
+            <a:spLocks noGrp="1"/>
+          </p:cNvSpPr>
+          <p:nvPr>
+            <p:ph type="body" idx="1"/>
+          </p:nvPr>
+        </p:nvSpPr>
+        <p:spPr/>
+        <p:txBody>
+          <a:bodyPr/>
+          <a:lstStyle/>
+          <a:p>
+            <a:r>
+              <a:rPr lang="en-US" dirty="0"/>
+              <a:t>The Rust rewrite + "why it's now impossible" is the key deliverable — it proves they understand the cure, not just the exploit. AI-resilient tasks count.</a:t>
+            </a:r>
+            <a:endParaRPr lang="en-US" dirty="0"/>
+          </a:p>
+        </p:txBody>
+      </p:sp>
+      <p:sp>
+        <p:nvSpPr>
+          <p:cNvPr id="4" name="Slide Number Placeholder 3"/>
+          <p:cNvSpPr>
+            <a:spLocks noGrp="1"/>
+          </p:cNvSpPr>
+          <p:nvPr>
+            <p:ph type="sldNum" sz="quarter" idx="10"/>
+          </p:nvPr>
+        </p:nvSpPr>
+        <p:spPr/>
+        <p:txBody>
+          <a:bodyPr/>
+          <a:lstStyle/>
+          <a:p>
+            <a:fld id="{F7021451-1387-4CA6-816F-3879F97B5CBC}" type="slidenum">
+              <a:rPr lang="en-US"/>
+              <a:t>16</a:t>
+            </a:fld>
+            <a:endParaRPr lang="en-US"/>
+          </a:p>
+        </p:txBody>
+      </p:sp>
+    </p:spTree>
+    <p:extLst>
+      <p:ext uri="{BB962C8B-B14F-4D97-AF65-F5344CB8AC3E}">
+        <p14:creationId xmlns:p14="http://schemas.microsoft.com/office/powerpoint/2010/main" val="1024086991"/>
+      </p:ext>
+    </p:extLst>
+  </p:cSld>
+  <p:clrMapOvr>
+    <a:masterClrMapping/>
+  </p:clrMapOvr>
+</p:notes>
+</file>
+
+<file path=ppt/notesSlides/notesSlide17.xml><?xml version="1.0" encoding="utf-8"?>
+<p:notes xmlns:a="http://schemas.openxmlformats.org/drawingml/2006/main" xmlns:r="http://schemas.openxmlformats.org/officeDocument/2006/relationships" xmlns:p="http://schemas.openxmlformats.org/presentationml/2006/main">
+  <p:cSld>
+    <p:spTree>
+      <p:nvGrpSpPr>
+        <p:cNvPr id="1" name=""/>
+        <p:cNvGrpSpPr/>
+        <p:nvPr/>
+      </p:nvGrpSpPr>
+      <p:grpSpPr>
+        <a:xfrm>
+          <a:off x="0" y="0"/>
+          <a:ext cx="0" cy="0"/>
+          <a:chOff x="0" y="0"/>
+          <a:chExt cx="0" cy="0"/>
+        </a:xfrm>
+      </p:grpSpPr>
+      <p:sp>
+        <p:nvSpPr>
+          <p:cNvPr id="2" name="Slide Image Placeholder 1"/>
+          <p:cNvSpPr>
+            <a:spLocks noGrp="1" noRot="1" noChangeAspect="1"/>
+          </p:cNvSpPr>
+          <p:nvPr>
+            <p:ph type="sldImg"/>
+          </p:nvPr>
+        </p:nvSpPr>
+        <p:spPr/>
+      </p:sp>
+      <p:sp>
+        <p:nvSpPr>
+          <p:cNvPr id="3" name="Notes Placeholder 2"/>
+          <p:cNvSpPr>
+            <a:spLocks noGrp="1"/>
+          </p:cNvSpPr>
+          <p:nvPr>
+            <p:ph type="body" idx="1"/>
+          </p:nvPr>
+        </p:nvSpPr>
+        <p:spPr/>
+        <p:txBody>
+          <a:bodyPr/>
+          <a:lstStyle/>
+          <a:p>
+            <a:r>
+              <a:rPr lang="en-US" dirty="0"/>
+              <a:t>Recap. Cold-call: "why aren't stack canaries enough?" (they detect, don't prevent; bypassable via leaks — the cure is memory safety). ~2 min.</a:t>
+            </a:r>
+            <a:endParaRPr lang="en-US" dirty="0"/>
+          </a:p>
+        </p:txBody>
+      </p:sp>
+      <p:sp>
+        <p:nvSpPr>
+          <p:cNvPr id="4" name="Slide Number Placeholder 3"/>
+          <p:cNvSpPr>
+            <a:spLocks noGrp="1"/>
+          </p:cNvSpPr>
+          <p:nvPr>
+            <p:ph type="sldNum" sz="quarter" idx="10"/>
+          </p:nvPr>
+        </p:nvSpPr>
+        <p:spPr/>
+        <p:txBody>
+          <a:bodyPr/>
+          <a:lstStyle/>
+          <a:p>
+            <a:fld id="{F7021451-1387-4CA6-816F-3879F97B5CBC}" type="slidenum">
+              <a:rPr lang="en-US"/>
+              <a:t>17</a:t>
+            </a:fld>
+            <a:endParaRPr lang="en-US"/>
+          </a:p>
+        </p:txBody>
+      </p:sp>
+    </p:spTree>
+    <p:extLst>
+      <p:ext uri="{BB962C8B-B14F-4D97-AF65-F5344CB8AC3E}">
+        <p14:creationId xmlns:p14="http://schemas.microsoft.com/office/powerpoint/2010/main" val="1024086991"/>
+      </p:ext>
+    </p:extLst>
+  </p:cSld>
+  <p:clrMapOvr>
+    <a:masterClrMapping/>
+  </p:clrMapOvr>
+</p:notes>
+</file>
+
+<file path=ppt/notesSlides/notesSlide18.xml><?xml version="1.0" encoding="utf-8"?>
+<p:notes xmlns:a="http://schemas.openxmlformats.org/drawingml/2006/main" xmlns:r="http://schemas.openxmlformats.org/officeDocument/2006/relationships" xmlns:p="http://schemas.openxmlformats.org/presentationml/2006/main">
+  <p:cSld>
+    <p:spTree>
+      <p:nvGrpSpPr>
+        <p:cNvPr id="1" name=""/>
+        <p:cNvGrpSpPr/>
+        <p:nvPr/>
+      </p:nvGrpSpPr>
+      <p:grpSpPr>
+        <a:xfrm>
+          <a:off x="0" y="0"/>
+          <a:ext cx="0" cy="0"/>
+          <a:chOff x="0" y="0"/>
+          <a:chExt cx="0" cy="0"/>
+        </a:xfrm>
+      </p:grpSpPr>
+      <p:sp>
+        <p:nvSpPr>
+          <p:cNvPr id="2" name="Slide Image Placeholder 1"/>
+          <p:cNvSpPr>
+            <a:spLocks noGrp="1" noRot="1" noChangeAspect="1"/>
+          </p:cNvSpPr>
+          <p:nvPr>
+            <p:ph type="sldImg"/>
+          </p:nvPr>
+        </p:nvSpPr>
+        <p:spPr/>
+      </p:sp>
+      <p:sp>
+        <p:nvSpPr>
+          <p:cNvPr id="3" name="Notes Placeholder 2"/>
+          <p:cNvSpPr>
+            <a:spLocks noGrp="1"/>
+          </p:cNvSpPr>
+          <p:nvPr>
+            <p:ph type="body" idx="1"/>
+          </p:nvPr>
+        </p:nvSpPr>
+        <p:spPr/>
+        <p:txBody>
+          <a:bodyPr/>
+          <a:lstStyle/>
+          <a:p>
+            <a:r>
+              <a:rPr lang="en-US" dirty="0"/>
+              <a:t>Cliffhanger: "Next week — one poisoned dependency owns thousands of victims; we'll replay xz and SolarWinds-style attacks."</a:t>
+            </a:r>
+            <a:endParaRPr lang="en-US" dirty="0"/>
+          </a:p>
+        </p:txBody>
+      </p:sp>
+      <p:sp>
+        <p:nvSpPr>
+          <p:cNvPr id="4" name="Slide Number Placeholder 3"/>
+          <p:cNvSpPr>
+            <a:spLocks noGrp="1"/>
+          </p:cNvSpPr>
+          <p:nvPr>
+            <p:ph type="sldNum" sz="quarter" idx="10"/>
+          </p:nvPr>
+        </p:nvSpPr>
+        <p:spPr/>
+        <p:txBody>
+          <a:bodyPr/>
+          <a:lstStyle/>
+          <a:p>
+            <a:fld id="{F7021451-1387-4CA6-816F-3879F97B5CBC}" type="slidenum">
+              <a:rPr lang="en-US"/>
+              <a:t>18</a:t>
             </a:fld>
             <a:endParaRPr lang="en-US"/>
           </a:p>
@@ -1219,7 +1578,8 @@
           <a:p>
             <a:r>
               <a:rPr lang="en-US" dirty="0"/>
-              <a:t>The worked example — the sim IS the board drawing, live. A local buffer sits BELOW the saved return address; writing past the buffer marches upward into the return address. Control the return address = control where the CPU jumps next. This is THE concept of the week. ~8 min.</a:t>
+              <a:t>The visual for the motivation — point at the ~70%, say "C/C++ is everywhere AND it's where most severe bugs live," then the policy response. Sets up why the week ends with the Rust rewrite. ~1 min.
+Diagram: Why memory safety still matters: C/C++ runs the world's critical infrastructure (OS kernels, browsers, embedded, network stacks); memory bugs are about 70% of severe CVEs historically (Microsoft, Chrome and Android all agree); and it is now a national-policy issue (CISA Secure by Design, ONCD memory-safe roadmap, NSA guidance). Memory safety is not a legacy footnote — it is still the dominant source of serious vulnerabilities, which is why this week ends at "rewrite it in a memory-safe language".</a:t>
             </a:r>
             <a:endParaRPr lang="en-US" dirty="0"/>
           </a:p>
@@ -1307,7 +1667,7 @@
           <a:p>
             <a:r>
               <a:rPr lang="en-US" dirty="0"/>
-              <a:t>Map the family — these four are what's actually in vuln.c/fuzz_harness.c, verified against the source. UAF and off-by-one are legitimate classes worth mentioning exist, but don't cite them as "this week's bug classes" — nothing here demonstrates them. CWE-121 (this week's actual bug) ranks #14 in the 2025 CWE Top 25 — a stronger, on-topic stat than the old CWE-787-was-#1 line, which is now #5. ~3 min.</a:t>
+              <a:t>The worked example — the sim IS the board drawing, live. A local buffer sits BELOW the saved return address; writing past the buffer marches upward into the return address. Control the return address = control where the CPU jumps next. This is THE concept of the week. ~8 min.</a:t>
             </a:r>
             <a:endParaRPr lang="en-US" dirty="0"/>
           </a:p>
@@ -1395,7 +1755,7 @@
           <a:p>
             <a:r>
               <a:rPr lang="en-US" dirty="0"/>
-              <a:t>Connect to W2 fuzzing (now hands-on). Coverage-guided = the fuzzer mutates inputs and keeps the ones that reach NEW code, so it "learns" its way to deep bugs. ASan turns a silent corruption into a precise crash report. This is round 1 of the game. ~6 min.</a:t>
+              <a:t>Map the family — these four are what's actually in vuln.c/fuzz_harness.c, verified against the source. UAF and off-by-one are legitimate classes worth mentioning exist, but don't cite them as "this week's bug classes" — nothing here demonstrates them. CWE-121 (this week's actual bug) ranks #14 in the 2025 CWE Top 25 — a stronger, on-topic stat than the old CWE-787-was-#1 line, which is now #5. ~3 min.</a:t>
             </a:r>
             <a:endParaRPr lang="en-US" dirty="0"/>
           </a:p>
@@ -1483,7 +1843,8 @@
           <a:p>
             <a:r>
               <a:rPr lang="en-US" dirty="0"/>
-              <a:t>Walk the exploit method. Cyclic pattern (De Bruijn) tells you exactly how many bytes for THIS specific build — stress that 72 is a fact about the unhardened binary, not a fact about the bug; the sim/exploit-chain diagram shows this shift explicitly. Then overwrite it with the address of win(). Format string: %x leaks stack, %n writes — a primitive most students haven't seen. This is round 2 (pwn). ~6 min.</a:t>
+              <a:t>The four classes as cards — each is a weakness definition (what it IS), not a how-to. Point out CWE-121 is the stack case of the CWE-787 umbrella, and that gets() (CWE-242) is so unsafe it was removed from the C standard. Keep the UAF/off-by-one footnote honest — those aren't in this binary. ~1 min.
+Diagram: The four memory-safety weakness classes present in this week's vuln.c, as a classification (not an exploitation guide): CWE-121 stack-based buffer overflow (writing past a fixed char buf[] overruns adjacent stack memory), CWE-787 out-of-bounds write (the umbrella class, of which CWE-121 is the stack case), CWE-134 use of an externally-controlled format string (printf(user) instead of printf("%s", user) lets input read or corrupt memory), and CWE-242 use of an inherently dangerous function (gets(), which cannot be used safely and was removed from C11). Footnote: this binary has no use-after-free and no off-by-one — real classes, just not in this code.</a:t>
             </a:r>
             <a:endParaRPr lang="en-US" dirty="0"/>
           </a:p>
@@ -1571,7 +1932,8 @@
           <a:p>
             <a:r>
               <a:rPr lang="en-US" dirty="0"/>
-              <a:t>THE key correction this slide needed: FORTIFY_SOURCE checks at the copy call, before the function even returns — so on the hardened build it always wins the race against the canary, which only checks at return time. This lab's own interactive sim literally calls "the canary detects it" the week's most reliable wrong answer — don't teach it. NX is a real mitigation but not for THIS exploit (ret2win, no injected shellcode) — say so explicitly rather than implying all four defenses equally harden the one attack just demonstrated. Worksheet Q4 grades naming all four (canary/PIE/NX/FORTIFY) + what each defeats — FORTIFY must be on this slide. ~5 min.</a:t>
+              <a:t>Connect to W2 fuzzing (now hands-on). Coverage-guided = the fuzzer mutates inputs and keeps the ones that reach NEW code, so it "learns" its way to deep bugs. ASan turns a silent corruption into a precise crash report. This is round 1 of the game. ~6 min.
+Diagram: Coverage-guided fuzzing as a feedback loop. The top row runs seed corpus → mutate (flip/splice bytes) → run target → "what happened?", which asks two questions. First: did the input reach NEW code? If yes it's kept and added to the corpus, and a dashed arrow feeds back to mutate — this is the coverage-guided loop that lets the fuzzer learn its way to deep bugs instead of guessing blindly. Second: did it crash? If yes, AddressSanitizer turns a silent memory corruption into a precise report naming the faulting line, and the crashing input is minimized and saved as crash-&lt;hash&gt;. Two notes: coverage guidance reaches bugs a random generator never would, and ASan turns a mystery segfault into an actionable root cause. This is round 1 of the lab — finding the crash, not exploiting it.</a:t>
             </a:r>
             <a:endParaRPr lang="en-US" dirty="0"/>
           </a:p>
@@ -1659,8 +2021,8 @@
           <a:p>
             <a:r>
               <a:rPr lang="en-US" dirty="0"/>
-              <a:t>Walk it top to bottom exactly once — this is the whole week's argument as one picture: which mitigation actually stops THIS exploit, and in what order they'd fire if more than one were present. Land on the same correction as the last slide: FORTIFY wins the race against the canary, every time, on this build. ~4 min.
-Diagram: A vertical attack chain from fuzzing finding the crash, to the unchecked strcpy overflow, to the overwritten return address, to a ret2win shell. Three mitigations cut this chain at different links: FORTIFY_SOURCE aborts at copy time, before any overwrite — this hardened build traps here, which students often misread as the canary. The stack canary only detects the smash at return, after the copy already happened. ASLR/PIE randomizes addresses so the fixed win() address is wrong. NX/DEP stops the OTHER exploitation path (injected shellcode), not this one.</a:t>
+              <a:t>Connect to W2 fuzzing (now hands-on). Coverage-guided = the fuzzer mutates inputs and keeps the ones that reach NEW code, so it "learns" its way to deep bugs. ASan turns a silent corruption into a precise crash report. This is round 1 of the game. ~6 min.
+Diagram: Coverage-guided fuzzing as a feedback loop. The top row runs seed corpus → mutate (flip/splice bytes) → run target → "what happened?", which asks two questions. First: did the input reach NEW code? If yes it's kept and added to the corpus, and a dashed arrow feeds back to mutate — this is the coverage-guided loop that lets the fuzzer learn its way to deep bugs instead of guessing blindly. Second: did it crash? If yes, AddressSanitizer turns a silent memory corruption into a precise report naming the faulting line, and the crashing input is minimized and saved as crash-&lt;hash&gt;. Two notes: coverage guidance reaches bugs a random generator never would, and ASan turns a mystery segfault into an actionable root cause. This is round 1 of the lab — finding the crash, not exploiting it.</a:t>
             </a:r>
             <a:endParaRPr lang="en-US" dirty="0"/>
           </a:p>
@@ -2035,7 +2397,7 @@
       </p:grpSpPr>
       <p:pic>
         <p:nvPicPr>
-          <p:cNvPr id="2" name="Image 0" descr="/private/tmp/claude-501/-Users-pop7-Library-CloudStorage-OneDrive-MonsterConnectCo--Ltd-Lecture-KOSEN69---software-security/e6d6556f-17de-403d-a9a0-cf2f846149b4/scratchpad/tree/slides/pptx/assets/logo-small.png">    </p:cNvPr>
+          <p:cNvPr id="2" name="Image 0" descr="/private/tmp/claude-501/-Users-pop7-Library-CloudStorage-OneDrive-MonsterConnectCo--Ltd-Lecture-KOSEN69---software-security/2a5e410a-41e6-41b1-93e2-54cd05af23b3/scratchpad/KOSEN69 - software-security/slides/pptx/assets/logo-small.png">    </p:cNvPr>
           <p:cNvPicPr>
             <a:picLocks noChangeAspect="1"/>
           </p:cNvPicPr>
@@ -2293,7 +2655,7 @@
                 <a:ea typeface="Arial" pitchFamily="34" charset="-122"/>
                 <a:cs typeface="Arial" pitchFamily="34" charset="-120"/>
               </a:rPr>
-              <a:t>The real fix: memory-safe languages</a:t>
+              <a:t>Exploiting a stack overflow</a:t>
             </a:r>
             <a:endParaRPr lang="en-US" sz="2600" dirty="0"/>
           </a:p>
@@ -2307,25 +2669,16 @@
         </p:nvSpPr>
         <p:spPr>
           <a:xfrm>
-            <a:off x="457200" y="1325880"/>
-            <a:ext cx="8229600" cy="1207008"/>
-          </a:xfrm>
-          <a:prstGeom prst="roundRect">
-            <a:avLst>
-              <a:gd name="adj" fmla="val 6061"/>
-            </a:avLst>
+            <a:off x="502920" y="1325880"/>
+            <a:ext cx="384048" cy="384048"/>
+          </a:xfrm>
+          <a:prstGeom prst="ellipse">
+            <a:avLst/>
           </a:prstGeom>
           <a:solidFill>
-            <a:srgbClr val="F1F5F9"/>
+            <a:srgbClr val="E35205"/>
           </a:solidFill>
           <a:ln/>
-          <a:effectLst>
-            <a:outerShdw sx="100000" sy="100000" kx="0" ky="0" algn="bl" rotWithShape="0" blurRad="76200" dist="25400" dir="5400000">
-              <a:srgbClr val="000000">
-                <a:alpha val="12000"/>
-              </a:srgbClr>
-            </a:outerShdw>
-          </a:effectLst>
         </p:spPr>
       </p:sp>
       <p:sp>
@@ -2336,8 +2689,8 @@
         </p:nvSpPr>
         <p:spPr>
           <a:xfrm>
-            <a:off x="731520" y="1435608"/>
-            <a:ext cx="7680960" cy="987552"/>
+            <a:off x="502920" y="1325880"/>
+            <a:ext cx="384048" cy="384048"/>
           </a:xfrm>
           <a:prstGeom prst="rect">
             <a:avLst/>
@@ -2346,20 +2699,55 @@
           <a:ln/>
         </p:spPr>
         <p:txBody>
-          <a:bodyPr wrap="square" lIns="0" tIns="0" rIns="0" bIns="0" rtlCol="0" anchor="t">
+          <a:bodyPr wrap="square" lIns="0" tIns="0" rIns="0" bIns="0" rtlCol="0" anchor="ctr"/>
+          <a:lstStyle/>
+          <a:p>
+            <a:pPr algn="ctr" indent="0" marL="0">
+              <a:buNone/>
+            </a:pPr>
+            <a:r>
+              <a:rPr lang="en-US" sz="1500" b="1" dirty="0">
+                <a:solidFill>
+                  <a:srgbClr val="0E1726"/>
+                </a:solidFill>
+                <a:latin typeface="Arial" pitchFamily="34" charset="0"/>
+                <a:ea typeface="Arial" pitchFamily="34" charset="-122"/>
+                <a:cs typeface="Arial" pitchFamily="34" charset="-120"/>
+              </a:rPr>
+              <a:t>1</a:t>
+            </a:r>
+            <a:endParaRPr lang="en-US" sz="1500" dirty="0"/>
+          </a:p>
+        </p:txBody>
+      </p:sp>
+      <p:sp>
+        <p:nvSpPr>
+          <p:cNvPr id="7" name="Text 4"/>
+          <p:cNvSpPr/>
+          <p:nvPr/>
+        </p:nvSpPr>
+        <p:spPr>
+          <a:xfrm>
+            <a:off x="1051560" y="1325880"/>
+            <a:ext cx="7589520" cy="914400"/>
+          </a:xfrm>
+          <a:prstGeom prst="rect">
+            <a:avLst/>
+          </a:prstGeom>
+          <a:noFill/>
+          <a:ln/>
+        </p:spPr>
+        <p:txBody>
+          <a:bodyPr wrap="square" lIns="0" tIns="0" rIns="0" bIns="0" rtlCol="0" anchor="ctr">
             <a:normAutofit/>
           </a:bodyPr>
           <a:lstStyle/>
           <a:p>
-            <a:pPr marL="342900" indent="-342900">
-              <a:spcAft>
-                <a:spcPts val="600"/>
-              </a:spcAft>
-              <a:buSzPct val="100000"/>
-              <a:buChar char="•"/>
-            </a:pPr>
-            <a:r>
-              <a:rPr lang="en-US" sz="1400" dirty="0">
+            <a:pPr indent="0" marL="0">
+              <a:buNone/>
+            </a:pPr>
+            <a:r>
+              <a:rPr lang="en-US" sz="1350" dirty="0">
                 <a:solidFill>
                   <a:srgbClr val="1F2937"/>
                 </a:solidFill>
@@ -2367,20 +2755,99 @@
                 <a:ea typeface="Calibri" pitchFamily="34" charset="-122"/>
                 <a:cs typeface="Calibri" pitchFamily="34" charset="-120"/>
               </a:rPr>
-              <a:t>Rust / Go remove whole bug classes by design</a:t>
-            </a:r>
-            <a:endParaRPr lang="en-US" sz="1400" dirty="0"/>
-          </a:p>
-          <a:p>
-            <a:pPr marL="342900" indent="-342900">
-              <a:spcAft>
-                <a:spcPts val="600"/>
-              </a:spcAft>
-              <a:buSzPct val="100000"/>
-              <a:buChar char="•"/>
-            </a:pPr>
-            <a:r>
-              <a:rPr lang="en-US" sz="1400" dirty="0">
+              <a:t>Find offset to return address with a cyclic pattern — verify it, don't assume it: this build's offset is 72 bytes, but enabling the stack canary alone moves it to 80 (the canary word sits between buffer and return address)</a:t>
+            </a:r>
+            <a:endParaRPr lang="en-US" sz="1350" dirty="0"/>
+          </a:p>
+        </p:txBody>
+      </p:sp>
+      <p:sp>
+        <p:nvSpPr>
+          <p:cNvPr id="8" name="Shape 5"/>
+          <p:cNvSpPr/>
+          <p:nvPr/>
+        </p:nvSpPr>
+        <p:spPr>
+          <a:xfrm>
+            <a:off x="502920" y="2313432"/>
+            <a:ext cx="384048" cy="384048"/>
+          </a:xfrm>
+          <a:prstGeom prst="ellipse">
+            <a:avLst/>
+          </a:prstGeom>
+          <a:solidFill>
+            <a:srgbClr val="E35205"/>
+          </a:solidFill>
+          <a:ln/>
+        </p:spPr>
+      </p:sp>
+      <p:sp>
+        <p:nvSpPr>
+          <p:cNvPr id="9" name="Text 6"/>
+          <p:cNvSpPr/>
+          <p:nvPr/>
+        </p:nvSpPr>
+        <p:spPr>
+          <a:xfrm>
+            <a:off x="502920" y="2313432"/>
+            <a:ext cx="384048" cy="384048"/>
+          </a:xfrm>
+          <a:prstGeom prst="rect">
+            <a:avLst/>
+          </a:prstGeom>
+          <a:noFill/>
+          <a:ln/>
+        </p:spPr>
+        <p:txBody>
+          <a:bodyPr wrap="square" lIns="0" tIns="0" rIns="0" bIns="0" rtlCol="0" anchor="ctr"/>
+          <a:lstStyle/>
+          <a:p>
+            <a:pPr algn="ctr" indent="0" marL="0">
+              <a:buNone/>
+            </a:pPr>
+            <a:r>
+              <a:rPr lang="en-US" sz="1500" b="1" dirty="0">
+                <a:solidFill>
+                  <a:srgbClr val="0E1726"/>
+                </a:solidFill>
+                <a:latin typeface="Arial" pitchFamily="34" charset="0"/>
+                <a:ea typeface="Arial" pitchFamily="34" charset="-122"/>
+                <a:cs typeface="Arial" pitchFamily="34" charset="-120"/>
+              </a:rPr>
+              <a:t>2</a:t>
+            </a:r>
+            <a:endParaRPr lang="en-US" sz="1500" dirty="0"/>
+          </a:p>
+        </p:txBody>
+      </p:sp>
+      <p:sp>
+        <p:nvSpPr>
+          <p:cNvPr id="10" name="Text 7"/>
+          <p:cNvSpPr/>
+          <p:nvPr/>
+        </p:nvSpPr>
+        <p:spPr>
+          <a:xfrm>
+            <a:off x="1051560" y="2313432"/>
+            <a:ext cx="7589520" cy="402336"/>
+          </a:xfrm>
+          <a:prstGeom prst="rect">
+            <a:avLst/>
+          </a:prstGeom>
+          <a:noFill/>
+          <a:ln/>
+        </p:spPr>
+        <p:txBody>
+          <a:bodyPr wrap="square" lIns="0" tIns="0" rIns="0" bIns="0" rtlCol="0" anchor="ctr">
+            <a:normAutofit/>
+          </a:bodyPr>
+          <a:lstStyle/>
+          <a:p>
+            <a:pPr indent="0" marL="0">
+              <a:buNone/>
+            </a:pPr>
+            <a:r>
+              <a:rPr lang="en-US" sz="1350" dirty="0">
                 <a:solidFill>
                   <a:srgbClr val="1F2937"/>
                 </a:solidFill>
@@ -2388,20 +2855,99 @@
                 <a:ea typeface="Calibri" pitchFamily="34" charset="-122"/>
                 <a:cs typeface="Calibri" pitchFamily="34" charset="-120"/>
               </a:rPr>
-              <a:t>CISA "Secure by Design" + ONCD: move off C/C++ for new code</a:t>
-            </a:r>
-            <a:endParaRPr lang="en-US" sz="1400" dirty="0"/>
-          </a:p>
-          <a:p>
-            <a:pPr marL="342900" indent="-342900">
-              <a:spcAft>
-                <a:spcPts val="600"/>
-              </a:spcAft>
-              <a:buSzPct val="100000"/>
-              <a:buChar char="•"/>
-            </a:pPr>
-            <a:r>
-              <a:rPr lang="en-US" sz="1400" dirty="0">
+              <a:t>Overwrite RA → jump to win()</a:t>
+            </a:r>
+            <a:endParaRPr lang="en-US" sz="1350" dirty="0"/>
+          </a:p>
+        </p:txBody>
+      </p:sp>
+      <p:sp>
+        <p:nvSpPr>
+          <p:cNvPr id="11" name="Shape 8"/>
+          <p:cNvSpPr/>
+          <p:nvPr/>
+        </p:nvSpPr>
+        <p:spPr>
+          <a:xfrm>
+            <a:off x="502920" y="2788920"/>
+            <a:ext cx="384048" cy="384048"/>
+          </a:xfrm>
+          <a:prstGeom prst="ellipse">
+            <a:avLst/>
+          </a:prstGeom>
+          <a:solidFill>
+            <a:srgbClr val="E35205"/>
+          </a:solidFill>
+          <a:ln/>
+        </p:spPr>
+      </p:sp>
+      <p:sp>
+        <p:nvSpPr>
+          <p:cNvPr id="12" name="Text 9"/>
+          <p:cNvSpPr/>
+          <p:nvPr/>
+        </p:nvSpPr>
+        <p:spPr>
+          <a:xfrm>
+            <a:off x="502920" y="2788920"/>
+            <a:ext cx="384048" cy="384048"/>
+          </a:xfrm>
+          <a:prstGeom prst="rect">
+            <a:avLst/>
+          </a:prstGeom>
+          <a:noFill/>
+          <a:ln/>
+        </p:spPr>
+        <p:txBody>
+          <a:bodyPr wrap="square" lIns="0" tIns="0" rIns="0" bIns="0" rtlCol="0" anchor="ctr"/>
+          <a:lstStyle/>
+          <a:p>
+            <a:pPr algn="ctr" indent="0" marL="0">
+              <a:buNone/>
+            </a:pPr>
+            <a:r>
+              <a:rPr lang="en-US" sz="1500" b="1" dirty="0">
+                <a:solidFill>
+                  <a:srgbClr val="0E1726"/>
+                </a:solidFill>
+                <a:latin typeface="Arial" pitchFamily="34" charset="0"/>
+                <a:ea typeface="Arial" pitchFamily="34" charset="-122"/>
+                <a:cs typeface="Arial" pitchFamily="34" charset="-120"/>
+              </a:rPr>
+              <a:t>3</a:t>
+            </a:r>
+            <a:endParaRPr lang="en-US" sz="1500" dirty="0"/>
+          </a:p>
+        </p:txBody>
+      </p:sp>
+      <p:sp>
+        <p:nvSpPr>
+          <p:cNvPr id="13" name="Text 10"/>
+          <p:cNvSpPr/>
+          <p:nvPr/>
+        </p:nvSpPr>
+        <p:spPr>
+          <a:xfrm>
+            <a:off x="1051560" y="2788920"/>
+            <a:ext cx="7589520" cy="402336"/>
+          </a:xfrm>
+          <a:prstGeom prst="rect">
+            <a:avLst/>
+          </a:prstGeom>
+          <a:noFill/>
+          <a:ln/>
+        </p:spPr>
+        <p:txBody>
+          <a:bodyPr wrap="square" lIns="0" tIns="0" rIns="0" bIns="0" rtlCol="0" anchor="ctr">
+            <a:normAutofit/>
+          </a:bodyPr>
+          <a:lstStyle/>
+          <a:p>
+            <a:pPr indent="0" marL="0">
+              <a:buNone/>
+            </a:pPr>
+            <a:r>
+              <a:rPr lang="en-US" sz="1350" dirty="0">
                 <a:solidFill>
                   <a:srgbClr val="1F2937"/>
                 </a:solidFill>
@@ -2409,15 +2955,15 @@
                 <a:ea typeface="Calibri" pitchFamily="34" charset="-122"/>
                 <a:cs typeface="Calibri" pitchFamily="34" charset="-120"/>
               </a:rPr>
-              <a:t>Borrow checker / bounds checks = no overflow, no UAF</a:t>
-            </a:r>
-            <a:endParaRPr lang="en-US" sz="1400" dirty="0"/>
-          </a:p>
-        </p:txBody>
-      </p:sp>
-      <p:sp>
-        <p:nvSpPr>
-          <p:cNvPr id="7" name="Text 4"/>
+              <a:t>Format string: %x%x%x leak, %n write</a:t>
+            </a:r>
+            <a:endParaRPr lang="en-US" sz="1350" dirty="0"/>
+          </a:p>
+        </p:txBody>
+      </p:sp>
+      <p:sp>
+        <p:nvSpPr>
+          <p:cNvPr id="14" name="Text 11"/>
           <p:cNvSpPr/>
           <p:nvPr/>
         </p:nvSpPr>
@@ -2456,7 +3002,7 @@
       </p:sp>
       <p:pic>
         <p:nvPicPr>
-          <p:cNvPr id="8" name="Image 1" descr="/private/tmp/claude-501/-Users-pop7-Library-CloudStorage-OneDrive-MonsterConnectCo--Ltd-Lecture-KOSEN69---software-security/e6d6556f-17de-403d-a9a0-cf2f846149b4/scratchpad/tree/slides/pptx/assets/logo-small.png">    </p:cNvPr>
+          <p:cNvPr id="15" name="Image 1" descr="/private/tmp/claude-501/-Users-pop7-Library-CloudStorage-OneDrive-MonsterConnectCo--Ltd-Lecture-KOSEN69---software-security/2a5e410a-41e6-41b1-93e2-54cd05af23b3/scratchpad/KOSEN69 - software-security/slides/pptx/assets/logo-small.png">    </p:cNvPr>
           <p:cNvPicPr>
             <a:picLocks noChangeAspect="1"/>
           </p:cNvPicPr>
@@ -2594,7 +3140,7 @@
                 <a:ea typeface="Arial" pitchFamily="34" charset="-122"/>
                 <a:cs typeface="Arial" pitchFamily="34" charset="-120"/>
               </a:rPr>
-              <a:t>💥 Game — Fuzzing Race → Pwn the Binary</a:t>
+              <a:t>Mitigations raise the bar</a:t>
             </a:r>
             <a:endParaRPr lang="en-US" sz="2600" dirty="0"/>
           </a:p>
@@ -2608,16 +3154,25 @@
         </p:nvSpPr>
         <p:spPr>
           <a:xfrm>
-            <a:off x="502920" y="1325880"/>
-            <a:ext cx="384048" cy="384048"/>
-          </a:xfrm>
-          <a:prstGeom prst="ellipse">
-            <a:avLst/>
+            <a:off x="457200" y="1325880"/>
+            <a:ext cx="8229600" cy="3035808"/>
+          </a:xfrm>
+          <a:prstGeom prst="roundRect">
+            <a:avLst>
+              <a:gd name="adj" fmla="val 2410"/>
+            </a:avLst>
           </a:prstGeom>
           <a:solidFill>
-            <a:srgbClr val="E35205"/>
+            <a:srgbClr val="F1F5F9"/>
           </a:solidFill>
           <a:ln/>
+          <a:effectLst>
+            <a:outerShdw sx="100000" sy="100000" kx="0" ky="0" algn="bl" rotWithShape="0" blurRad="76200" dist="25400" dir="5400000">
+              <a:srgbClr val="000000">
+                <a:alpha val="12000"/>
+              </a:srgbClr>
+            </a:outerShdw>
+          </a:effectLst>
         </p:spPr>
       </p:sp>
       <p:sp>
@@ -2628,8 +3183,8 @@
         </p:nvSpPr>
         <p:spPr>
           <a:xfrm>
-            <a:off x="502920" y="1325880"/>
-            <a:ext cx="384048" cy="384048"/>
+            <a:off x="731520" y="1435608"/>
+            <a:ext cx="7680960" cy="2816352"/>
           </a:xfrm>
           <a:prstGeom prst="rect">
             <a:avLst/>
@@ -2638,55 +3193,20 @@
           <a:ln/>
         </p:spPr>
         <p:txBody>
-          <a:bodyPr wrap="square" lIns="0" tIns="0" rIns="0" bIns="0" rtlCol="0" anchor="ctr"/>
-          <a:lstStyle/>
-          <a:p>
-            <a:pPr algn="ctr" indent="0" marL="0">
-              <a:buNone/>
-            </a:pPr>
-            <a:r>
-              <a:rPr lang="en-US" sz="1500" b="1" dirty="0">
-                <a:solidFill>
-                  <a:srgbClr val="0E1726"/>
-                </a:solidFill>
-                <a:latin typeface="Arial" pitchFamily="34" charset="0"/>
-                <a:ea typeface="Arial" pitchFamily="34" charset="-122"/>
-                <a:cs typeface="Arial" pitchFamily="34" charset="-120"/>
-              </a:rPr>
-              <a:t>1</a:t>
-            </a:r>
-            <a:endParaRPr lang="en-US" sz="1500" dirty="0"/>
-          </a:p>
-        </p:txBody>
-      </p:sp>
-      <p:sp>
-        <p:nvSpPr>
-          <p:cNvPr id="7" name="Text 4"/>
-          <p:cNvSpPr/>
-          <p:nvPr/>
-        </p:nvSpPr>
-        <p:spPr>
-          <a:xfrm>
-            <a:off x="1051560" y="1325880"/>
-            <a:ext cx="7589520" cy="402336"/>
-          </a:xfrm>
-          <a:prstGeom prst="rect">
-            <a:avLst/>
-          </a:prstGeom>
-          <a:noFill/>
-          <a:ln/>
-        </p:spPr>
-        <p:txBody>
-          <a:bodyPr wrap="square" lIns="0" tIns="0" rIns="0" bIns="0" rtlCol="0" anchor="ctr">
+          <a:bodyPr wrap="square" lIns="0" tIns="0" rIns="0" bIns="0" rtlCol="0" anchor="t">
             <a:normAutofit/>
           </a:bodyPr>
           <a:lstStyle/>
           <a:p>
-            <a:pPr indent="0" marL="0">
-              <a:buNone/>
-            </a:pPr>
-            <a:r>
-              <a:rPr lang="en-US" sz="1350" dirty="0">
+            <a:pPr marL="342900" indent="-342900">
+              <a:spcAft>
+                <a:spcPts val="600"/>
+              </a:spcAft>
+              <a:buSzPct val="100000"/>
+              <a:buChar char="•"/>
+            </a:pPr>
+            <a:r>
+              <a:rPr lang="en-US" sz="1400" dirty="0">
                 <a:solidFill>
                   <a:srgbClr val="1F2937"/>
                 </a:solidFill>
@@ -2694,99 +3214,20 @@
                 <a:ea typeface="Calibri" pitchFamily="34" charset="-122"/>
                 <a:cs typeface="Calibri" pitchFamily="34" charset="-120"/>
               </a:rPr>
-              <a:t>Round 1 (Fuzzing Race): first team to crash the target wins</a:t>
-            </a:r>
-            <a:endParaRPr lang="en-US" sz="1350" dirty="0"/>
-          </a:p>
-        </p:txBody>
-      </p:sp>
-      <p:sp>
-        <p:nvSpPr>
-          <p:cNvPr id="8" name="Shape 5"/>
-          <p:cNvSpPr/>
-          <p:nvPr/>
-        </p:nvSpPr>
-        <p:spPr>
-          <a:xfrm>
-            <a:off x="502920" y="1801368"/>
-            <a:ext cx="384048" cy="384048"/>
-          </a:xfrm>
-          <a:prstGeom prst="ellipse">
-            <a:avLst/>
-          </a:prstGeom>
-          <a:solidFill>
-            <a:srgbClr val="E35205"/>
-          </a:solidFill>
-          <a:ln/>
-        </p:spPr>
-      </p:sp>
-      <p:sp>
-        <p:nvSpPr>
-          <p:cNvPr id="9" name="Text 6"/>
-          <p:cNvSpPr/>
-          <p:nvPr/>
-        </p:nvSpPr>
-        <p:spPr>
-          <a:xfrm>
-            <a:off x="502920" y="1801368"/>
-            <a:ext cx="384048" cy="384048"/>
-          </a:xfrm>
-          <a:prstGeom prst="rect">
-            <a:avLst/>
-          </a:prstGeom>
-          <a:noFill/>
-          <a:ln/>
-        </p:spPr>
-        <p:txBody>
-          <a:bodyPr wrap="square" lIns="0" tIns="0" rIns="0" bIns="0" rtlCol="0" anchor="ctr"/>
-          <a:lstStyle/>
-          <a:p>
-            <a:pPr algn="ctr" indent="0" marL="0">
-              <a:buNone/>
-            </a:pPr>
-            <a:r>
-              <a:rPr lang="en-US" sz="1500" b="1" dirty="0">
-                <a:solidFill>
-                  <a:srgbClr val="0E1726"/>
-                </a:solidFill>
-                <a:latin typeface="Arial" pitchFamily="34" charset="0"/>
-                <a:ea typeface="Arial" pitchFamily="34" charset="-122"/>
-                <a:cs typeface="Arial" pitchFamily="34" charset="-120"/>
-              </a:rPr>
-              <a:t>2</a:t>
-            </a:r>
-            <a:endParaRPr lang="en-US" sz="1500" dirty="0"/>
-          </a:p>
-        </p:txBody>
-      </p:sp>
-      <p:sp>
-        <p:nvSpPr>
-          <p:cNvPr id="10" name="Text 7"/>
-          <p:cNvSpPr/>
-          <p:nvPr/>
-        </p:nvSpPr>
-        <p:spPr>
-          <a:xfrm>
-            <a:off x="1051560" y="1801368"/>
-            <a:ext cx="7589520" cy="402336"/>
-          </a:xfrm>
-          <a:prstGeom prst="rect">
-            <a:avLst/>
-          </a:prstGeom>
-          <a:noFill/>
-          <a:ln/>
-        </p:spPr>
-        <p:txBody>
-          <a:bodyPr wrap="square" lIns="0" tIns="0" rIns="0" bIns="0" rtlCol="0" anchor="ctr">
-            <a:normAutofit/>
-          </a:bodyPr>
-          <a:lstStyle/>
-          <a:p>
-            <a:pPr indent="0" marL="0">
-              <a:buNone/>
-            </a:pPr>
-            <a:r>
-              <a:rPr lang="en-US" sz="1350" dirty="0">
+              <a:t>FORTIFY_SOURCE — checks the copy itself, at call time (__stpcpy_chk or __strcpy_chk, depending on the compiler)</a:t>
+            </a:r>
+            <a:endParaRPr lang="en-US" sz="1400" dirty="0"/>
+          </a:p>
+          <a:p>
+            <a:pPr marL="342900" indent="-342900">
+              <a:spcAft>
+                <a:spcPts val="600"/>
+              </a:spcAft>
+              <a:buSzPct val="100000"/>
+              <a:buChar char="•"/>
+            </a:pPr>
+            <a:r>
+              <a:rPr lang="en-US" sz="1400" dirty="0">
                 <a:solidFill>
                   <a:srgbClr val="1F2937"/>
                 </a:solidFill>
@@ -2794,99 +3235,20 @@
                 <a:ea typeface="Calibri" pitchFamily="34" charset="-122"/>
                 <a:cs typeface="Calibri" pitchFamily="34" charset="-120"/>
               </a:rPr>
-              <a:t>Round 2 (Pwn): exploit the overflow / format string</a:t>
-            </a:r>
-            <a:endParaRPr lang="en-US" sz="1350" dirty="0"/>
-          </a:p>
-        </p:txBody>
-      </p:sp>
-      <p:sp>
-        <p:nvSpPr>
-          <p:cNvPr id="11" name="Shape 8"/>
-          <p:cNvSpPr/>
-          <p:nvPr/>
-        </p:nvSpPr>
-        <p:spPr>
-          <a:xfrm>
-            <a:off x="502920" y="2276856"/>
-            <a:ext cx="384048" cy="384048"/>
-          </a:xfrm>
-          <a:prstGeom prst="ellipse">
-            <a:avLst/>
-          </a:prstGeom>
-          <a:solidFill>
-            <a:srgbClr val="E35205"/>
-          </a:solidFill>
-          <a:ln/>
-        </p:spPr>
-      </p:sp>
-      <p:sp>
-        <p:nvSpPr>
-          <p:cNvPr id="12" name="Text 9"/>
-          <p:cNvSpPr/>
-          <p:nvPr/>
-        </p:nvSpPr>
-        <p:spPr>
-          <a:xfrm>
-            <a:off x="502920" y="2276856"/>
-            <a:ext cx="384048" cy="384048"/>
-          </a:xfrm>
-          <a:prstGeom prst="rect">
-            <a:avLst/>
-          </a:prstGeom>
-          <a:noFill/>
-          <a:ln/>
-        </p:spPr>
-        <p:txBody>
-          <a:bodyPr wrap="square" lIns="0" tIns="0" rIns="0" bIns="0" rtlCol="0" anchor="ctr"/>
-          <a:lstStyle/>
-          <a:p>
-            <a:pPr algn="ctr" indent="0" marL="0">
-              <a:buNone/>
-            </a:pPr>
-            <a:r>
-              <a:rPr lang="en-US" sz="1500" b="1" dirty="0">
-                <a:solidFill>
-                  <a:srgbClr val="0E1726"/>
-                </a:solidFill>
-                <a:latin typeface="Arial" pitchFamily="34" charset="0"/>
-                <a:ea typeface="Arial" pitchFamily="34" charset="-122"/>
-                <a:cs typeface="Arial" pitchFamily="34" charset="-120"/>
-              </a:rPr>
-              <a:t>3</a:t>
-            </a:r>
-            <a:endParaRPr lang="en-US" sz="1500" dirty="0"/>
-          </a:p>
-        </p:txBody>
-      </p:sp>
-      <p:sp>
-        <p:nvSpPr>
-          <p:cNvPr id="13" name="Text 10"/>
-          <p:cNvSpPr/>
-          <p:nvPr/>
-        </p:nvSpPr>
-        <p:spPr>
-          <a:xfrm>
-            <a:off x="1051560" y="2276856"/>
-            <a:ext cx="7589520" cy="402336"/>
-          </a:xfrm>
-          <a:prstGeom prst="rect">
-            <a:avLst/>
-          </a:prstGeom>
-          <a:noFill/>
-          <a:ln/>
-        </p:spPr>
-        <p:txBody>
-          <a:bodyPr wrap="square" lIns="0" tIns="0" rIns="0" bIns="0" rtlCol="0" anchor="ctr">
-            <a:normAutofit/>
-          </a:bodyPr>
-          <a:lstStyle/>
-          <a:p>
-            <a:pPr indent="0" marL="0">
-              <a:buNone/>
-            </a:pPr>
-            <a:r>
-              <a:rPr lang="en-US" sz="1350" dirty="0">
+              <a:t>Stack canaries — detect overwrite at function return, after the copy already happened</a:t>
+            </a:r>
+            <a:endParaRPr lang="en-US" sz="1400" dirty="0"/>
+          </a:p>
+          <a:p>
+            <a:pPr marL="342900" indent="-342900">
+              <a:spcAft>
+                <a:spcPts val="600"/>
+              </a:spcAft>
+              <a:buSzPct val="100000"/>
+              <a:buChar char="•"/>
+            </a:pPr>
+            <a:r>
+              <a:rPr lang="en-US" sz="1400" dirty="0">
                 <a:solidFill>
                   <a:srgbClr val="1F2937"/>
                 </a:solidFill>
@@ -2894,45 +3256,87 @@
                 <a:ea typeface="Calibri" pitchFamily="34" charset="-122"/>
                 <a:cs typeface="Calibri" pitchFamily="34" charset="-120"/>
               </a:rPr>
-              <a:t>Round 3 (Defend): rebuild with canary+ASLR+PIE, then rewrite in Rust</a:t>
-            </a:r>
-            <a:endParaRPr lang="en-US" sz="1350" dirty="0"/>
-          </a:p>
-        </p:txBody>
-      </p:sp>
-      <p:sp>
-        <p:nvSpPr>
-          <p:cNvPr id="14" name="Text 11"/>
-          <p:cNvSpPr/>
-          <p:nvPr/>
-        </p:nvSpPr>
-        <p:spPr>
-          <a:xfrm>
-            <a:off x="457200" y="4800600"/>
-            <a:ext cx="6949440" cy="274320"/>
-          </a:xfrm>
-          <a:prstGeom prst="rect">
-            <a:avLst/>
-          </a:prstGeom>
-          <a:noFill/>
-          <a:ln/>
-        </p:spPr>
-        <p:txBody>
-          <a:bodyPr wrap="square" lIns="0" tIns="0" rIns="0" bIns="0" rtlCol="0" anchor="ctr"/>
-          <a:lstStyle/>
-          <a:p>
-            <a:pPr indent="0" marL="0">
-              <a:buNone/>
-            </a:pPr>
-            <a:r>
-              <a:rPr lang="en-US" sz="900" dirty="0">
-                <a:solidFill>
-                  <a:srgbClr val="64748B"/>
+              <a:t>ASLR / PIE — randomize addresses</a:t>
+            </a:r>
+            <a:endParaRPr lang="en-US" sz="1400" dirty="0"/>
+          </a:p>
+          <a:p>
+            <a:pPr marL="342900" indent="-342900">
+              <a:spcAft>
+                <a:spcPts val="600"/>
+              </a:spcAft>
+              <a:buSzPct val="100000"/>
+              <a:buChar char="•"/>
+            </a:pPr>
+            <a:r>
+              <a:rPr lang="en-US" sz="1400" dirty="0">
+                <a:solidFill>
+                  <a:srgbClr val="1F2937"/>
                 </a:solidFill>
                 <a:latin typeface="Calibri" pitchFamily="34" charset="0"/>
                 <a:ea typeface="Calibri" pitchFamily="34" charset="-122"/>
                 <a:cs typeface="Calibri" pitchFamily="34" charset="-120"/>
               </a:rPr>
+              <a:t>NX/DEP — blocks executing shellcode planted on the stack — irrelevant to this exploit, which returns into existing code (win()), never injects shellcode</a:t>
+            </a:r>
+            <a:endParaRPr lang="en-US" sz="1400" dirty="0"/>
+          </a:p>
+          <a:p>
+            <a:pPr marL="342900" indent="-342900">
+              <a:spcAft>
+                <a:spcPts val="600"/>
+              </a:spcAft>
+              <a:buSzPct val="100000"/>
+              <a:buChar char="•"/>
+            </a:pPr>
+            <a:r>
+              <a:rPr lang="en-US" sz="1400" dirty="0">
+                <a:solidFill>
+                  <a:srgbClr val="1F2937"/>
+                </a:solidFill>
+                <a:latin typeface="Calibri" pitchFamily="34" charset="0"/>
+                <a:ea typeface="Calibri" pitchFamily="34" charset="-122"/>
+                <a:cs typeface="Calibri" pitchFamily="34" charset="-120"/>
+              </a:rPr>
+              <a:t>On this lab's hardened build, FORTIFY fires first — *** buffer overflow detected ***: terminated. The canary never gets a chance to speak. Verify the order yourself before teaching it as "canary catches it" — that's the wrong answer this lab's own materials were rewritten to correct.</a:t>
+            </a:r>
+            <a:endParaRPr lang="en-US" sz="1400" dirty="0"/>
+          </a:p>
+        </p:txBody>
+      </p:sp>
+      <p:sp>
+        <p:nvSpPr>
+          <p:cNvPr id="7" name="Text 4"/>
+          <p:cNvSpPr/>
+          <p:nvPr/>
+        </p:nvSpPr>
+        <p:spPr>
+          <a:xfrm>
+            <a:off x="457200" y="4800600"/>
+            <a:ext cx="6949440" cy="274320"/>
+          </a:xfrm>
+          <a:prstGeom prst="rect">
+            <a:avLst/>
+          </a:prstGeom>
+          <a:noFill/>
+          <a:ln/>
+        </p:spPr>
+        <p:txBody>
+          <a:bodyPr wrap="square" lIns="0" tIns="0" rIns="0" bIns="0" rtlCol="0" anchor="ctr"/>
+          <a:lstStyle/>
+          <a:p>
+            <a:pPr indent="0" marL="0">
+              <a:buNone/>
+            </a:pPr>
+            <a:r>
+              <a:rPr lang="en-US" sz="900" dirty="0">
+                <a:solidFill>
+                  <a:srgbClr val="64748B"/>
+                </a:solidFill>
+                <a:latin typeface="Calibri" pitchFamily="34" charset="0"/>
+                <a:ea typeface="Calibri" pitchFamily="34" charset="-122"/>
+                <a:cs typeface="Calibri" pitchFamily="34" charset="-120"/>
+              </a:rPr>
               <a:t>Software Security · Week 11</a:t>
             </a:r>
             <a:endParaRPr lang="en-US" sz="900" dirty="0"/>
@@ -2941,7 +3345,7 @@
       </p:sp>
       <p:pic>
         <p:nvPicPr>
-          <p:cNvPr id="15" name="Image 1" descr="/private/tmp/claude-501/-Users-pop7-Library-CloudStorage-OneDrive-MonsterConnectCo--Ltd-Lecture-KOSEN69---software-security/e6d6556f-17de-403d-a9a0-cf2f846149b4/scratchpad/tree/slides/pptx/assets/logo-small.png">    </p:cNvPr>
+          <p:cNvPr id="8" name="Image 1" descr="/private/tmp/claude-501/-Users-pop7-Library-CloudStorage-OneDrive-MonsterConnectCo--Ltd-Lecture-KOSEN69---software-security/2a5e410a-41e6-41b1-93e2-54cd05af23b3/scratchpad/KOSEN69 - software-security/slides/pptx/assets/logo-small.png">    </p:cNvPr>
           <p:cNvPicPr>
             <a:picLocks noChangeAspect="1"/>
           </p:cNvPicPr>
@@ -3079,44 +3483,46 @@
                 <a:ea typeface="Arial" pitchFamily="34" charset="-122"/>
                 <a:cs typeface="Arial" pitchFamily="34" charset="-120"/>
               </a:rPr>
-              <a:t>Deliverable</a:t>
+              <a:t>From strcpy to shell — where each mitigation cuts the chain</a:t>
             </a:r>
             <a:endParaRPr lang="en-US" sz="2600" dirty="0"/>
           </a:p>
         </p:txBody>
       </p:sp>
-      <p:sp>
-        <p:nvSpPr>
-          <p:cNvPr id="5" name="Shape 2"/>
-          <p:cNvSpPr/>
-          <p:nvPr/>
-        </p:nvSpPr>
-        <p:spPr>
-          <a:xfrm>
-            <a:off x="457200" y="1325880"/>
-            <a:ext cx="8229600" cy="1097280"/>
-          </a:xfrm>
-          <a:prstGeom prst="roundRect">
-            <a:avLst>
-              <a:gd name="adj" fmla="val 6667"/>
-            </a:avLst>
-          </a:prstGeom>
-          <a:solidFill>
-            <a:srgbClr val="E8EDF3"/>
-          </a:solidFill>
-          <a:ln/>
-        </p:spPr>
-      </p:sp>
-      <p:sp>
-        <p:nvSpPr>
-          <p:cNvPr id="6" name="Text 3"/>
-          <p:cNvSpPr/>
-          <p:nvPr/>
-        </p:nvSpPr>
-        <p:spPr>
-          <a:xfrm>
-            <a:off x="731520" y="1325880"/>
-            <a:ext cx="7680960" cy="1097280"/>
+      <p:pic>
+        <p:nvPicPr>
+          <p:cNvPr id="5" name="Image 1" descr="A vertical attack chain from fuzzing finding the crash, to the unchecked strcpy overflow, to the overwritten return address, to a ret2win shell. Three mitigations cut this chain at different links: FORTIFY_SOURCE aborts at copy time, before any overwrite — this hardened build traps here, which students often misread as the canary. The stack canary only detects the smash at return, after the copy already happened. ASLR/PIE randomizes addresses so the fixed win() address is wrong. NX/DEP stops the OTHER exploitation path (injected shellcode), not this one.">    </p:cNvPr>
+          <p:cNvPicPr>
+            <a:picLocks noChangeAspect="1"/>
+          </p:cNvPicPr>
+          <p:nvPr/>
+        </p:nvPicPr>
+        <p:blipFill>
+          <a:blip r:embed="rId2"/>
+          <a:stretch>
+            <a:fillRect/>
+          </a:stretch>
+        </p:blipFill>
+        <p:spPr>
+          <a:xfrm>
+            <a:off x="2627264" y="1097280"/>
+            <a:ext cx="3889472" cy="3566160"/>
+          </a:xfrm>
+          <a:prstGeom prst="rect">
+            <a:avLst/>
+          </a:prstGeom>
+        </p:spPr>
+      </p:pic>
+      <p:sp>
+        <p:nvSpPr>
+          <p:cNvPr id="6" name="Text 2"/>
+          <p:cNvSpPr/>
+          <p:nvPr/>
+        </p:nvSpPr>
+        <p:spPr>
+          <a:xfrm>
+            <a:off x="457200" y="4800600"/>
+            <a:ext cx="6949440" cy="274320"/>
           </a:xfrm>
           <a:prstGeom prst="rect">
             <a:avLst/>
@@ -3125,199 +3531,21 @@
           <a:ln/>
         </p:spPr>
         <p:txBody>
-          <a:bodyPr wrap="square" lIns="0" tIns="0" rIns="0" bIns="0" rtlCol="0" anchor="ctr">
-            <a:normAutofit/>
-          </a:bodyPr>
+          <a:bodyPr wrap="square" lIns="0" tIns="0" rIns="0" bIns="0" rtlCol="0" anchor="ctr"/>
           <a:lstStyle/>
           <a:p>
             <a:pPr indent="0" marL="0">
               <a:buNone/>
             </a:pPr>
             <a:r>
-              <a:rPr lang="en-US" sz="1400" i="1" dirty="0">
-                <a:solidFill>
-                  <a:srgbClr val="E35205"/>
+              <a:rPr lang="en-US" sz="900" dirty="0">
+                <a:solidFill>
+                  <a:srgbClr val="64748B"/>
                 </a:solidFill>
                 <a:latin typeface="Calibri" pitchFamily="34" charset="0"/>
                 <a:ea typeface="Calibri" pitchFamily="34" charset="-122"/>
                 <a:cs typeface="Calibri" pitchFamily="34" charset="-120"/>
               </a:rPr>
-              <a:t>📋 Worksheet 11 — labs/week11-memory-safety-exploitation/worksheet.md (Part 3) · kickoff: in the toolbox container (labs/toolbox — Apple clang has no libFuzzer runtime): clang -g -fsanitize=address,fuzzer fuzz_harness.c -o fuzz &amp;&amp; ./fuzz</a:t>
-            </a:r>
-            <a:endParaRPr lang="en-US" sz="1400" dirty="0"/>
-          </a:p>
-        </p:txBody>
-      </p:sp>
-      <p:sp>
-        <p:nvSpPr>
-          <p:cNvPr id="7" name="Shape 4"/>
-          <p:cNvSpPr/>
-          <p:nvPr/>
-        </p:nvSpPr>
-        <p:spPr>
-          <a:xfrm>
-            <a:off x="457200" y="2587752"/>
-            <a:ext cx="8229600" cy="1517904"/>
-          </a:xfrm>
-          <a:prstGeom prst="roundRect">
-            <a:avLst>
-              <a:gd name="adj" fmla="val 4819"/>
-            </a:avLst>
-          </a:prstGeom>
-          <a:solidFill>
-            <a:srgbClr val="F1F5F9"/>
-          </a:solidFill>
-          <a:ln/>
-          <a:effectLst>
-            <a:outerShdw sx="100000" sy="100000" kx="0" ky="0" algn="bl" rotWithShape="0" blurRad="76200" dist="25400" dir="5400000">
-              <a:srgbClr val="000000">
-                <a:alpha val="12000"/>
-              </a:srgbClr>
-            </a:outerShdw>
-          </a:effectLst>
-        </p:spPr>
-      </p:sp>
-      <p:sp>
-        <p:nvSpPr>
-          <p:cNvPr id="8" name="Text 5"/>
-          <p:cNvSpPr/>
-          <p:nvPr/>
-        </p:nvSpPr>
-        <p:spPr>
-          <a:xfrm>
-            <a:off x="731520" y="2697480"/>
-            <a:ext cx="7680960" cy="1298448"/>
-          </a:xfrm>
-          <a:prstGeom prst="rect">
-            <a:avLst/>
-          </a:prstGeom>
-          <a:noFill/>
-          <a:ln/>
-        </p:spPr>
-        <p:txBody>
-          <a:bodyPr wrap="square" lIns="0" tIns="0" rIns="0" bIns="0" rtlCol="0" anchor="t">
-            <a:normAutofit/>
-          </a:bodyPr>
-          <a:lstStyle/>
-          <a:p>
-            <a:pPr marL="342900" indent="-342900">
-              <a:spcAft>
-                <a:spcPts val="600"/>
-              </a:spcAft>
-              <a:buSzPct val="100000"/>
-              <a:buChar char="•"/>
-            </a:pPr>
-            <a:r>
-              <a:rPr lang="en-US" sz="1400" dirty="0">
-                <a:solidFill>
-                  <a:srgbClr val="1F2937"/>
-                </a:solidFill>
-                <a:latin typeface="Calibri" pitchFamily="34" charset="0"/>
-                <a:ea typeface="Calibri" pitchFamily="34" charset="-122"/>
-                <a:cs typeface="Calibri" pitchFamily="34" charset="-120"/>
-              </a:rPr>
-              <a:t>Fuzzing crash + exploit script</a:t>
-            </a:r>
-            <a:endParaRPr lang="en-US" sz="1400" dirty="0"/>
-          </a:p>
-          <a:p>
-            <a:pPr marL="342900" indent="-342900">
-              <a:spcAft>
-                <a:spcPts val="600"/>
-              </a:spcAft>
-              <a:buSzPct val="100000"/>
-              <a:buChar char="•"/>
-            </a:pPr>
-            <a:r>
-              <a:rPr lang="en-US" sz="1400" dirty="0">
-                <a:solidFill>
-                  <a:srgbClr val="1F2937"/>
-                </a:solidFill>
-                <a:latin typeface="Calibri" pitchFamily="34" charset="0"/>
-                <a:ea typeface="Calibri" pitchFamily="34" charset="-122"/>
-                <a:cs typeface="Calibri" pitchFamily="34" charset="-120"/>
-              </a:rPr>
-              <a:t>Annotated Ghidra/gdb analysis</a:t>
-            </a:r>
-            <a:endParaRPr lang="en-US" sz="1400" dirty="0"/>
-          </a:p>
-          <a:p>
-            <a:pPr marL="342900" indent="-342900">
-              <a:spcAft>
-                <a:spcPts val="600"/>
-              </a:spcAft>
-              <a:buSzPct val="100000"/>
-              <a:buChar char="•"/>
-            </a:pPr>
-            <a:r>
-              <a:rPr lang="en-US" sz="1400" dirty="0">
-                <a:solidFill>
-                  <a:srgbClr val="1F2937"/>
-                </a:solidFill>
-                <a:latin typeface="Calibri" pitchFamily="34" charset="0"/>
-                <a:ea typeface="Calibri" pitchFamily="34" charset="-122"/>
-                <a:cs typeface="Calibri" pitchFamily="34" charset="-120"/>
-              </a:rPr>
-              <a:t>Memory-safe (Rust) rewrite + why the bug is now impossible</a:t>
-            </a:r>
-            <a:endParaRPr lang="en-US" sz="1400" dirty="0"/>
-          </a:p>
-          <a:p>
-            <a:pPr marL="342900" indent="-342900">
-              <a:spcAft>
-                <a:spcPts val="600"/>
-              </a:spcAft>
-              <a:buSzPct val="100000"/>
-              <a:buChar char="•"/>
-            </a:pPr>
-            <a:r>
-              <a:rPr lang="en-US" sz="1400" dirty="0">
-                <a:solidFill>
-                  <a:srgbClr val="1F2937"/>
-                </a:solidFill>
-                <a:latin typeface="Calibri" pitchFamily="34" charset="0"/>
-                <a:ea typeface="Calibri" pitchFamily="34" charset="-122"/>
-                <a:cs typeface="Calibri" pitchFamily="34" charset="-120"/>
-              </a:rPr>
-              <a:t>+ Audit the AI / EiPE / Prompt Problem (see worksheet)</a:t>
-            </a:r>
-            <a:endParaRPr lang="en-US" sz="1400" dirty="0"/>
-          </a:p>
-        </p:txBody>
-      </p:sp>
-      <p:sp>
-        <p:nvSpPr>
-          <p:cNvPr id="9" name="Text 6"/>
-          <p:cNvSpPr/>
-          <p:nvPr/>
-        </p:nvSpPr>
-        <p:spPr>
-          <a:xfrm>
-            <a:off x="457200" y="4800600"/>
-            <a:ext cx="6949440" cy="274320"/>
-          </a:xfrm>
-          <a:prstGeom prst="rect">
-            <a:avLst/>
-          </a:prstGeom>
-          <a:noFill/>
-          <a:ln/>
-        </p:spPr>
-        <p:txBody>
-          <a:bodyPr wrap="square" lIns="0" tIns="0" rIns="0" bIns="0" rtlCol="0" anchor="ctr"/>
-          <a:lstStyle/>
-          <a:p>
-            <a:pPr indent="0" marL="0">
-              <a:buNone/>
-            </a:pPr>
-            <a:r>
-              <a:rPr lang="en-US" sz="900" dirty="0">
-                <a:solidFill>
-                  <a:srgbClr val="64748B"/>
-                </a:solidFill>
-                <a:latin typeface="Calibri" pitchFamily="34" charset="0"/>
-                <a:ea typeface="Calibri" pitchFamily="34" charset="-122"/>
-                <a:cs typeface="Calibri" pitchFamily="34" charset="-120"/>
-              </a:rPr>
               <a:t>Software Security · Week 11</a:t>
             </a:r>
             <a:endParaRPr lang="en-US" sz="900" dirty="0"/>
@@ -3326,14 +3554,14 @@
       </p:sp>
       <p:pic>
         <p:nvPicPr>
-          <p:cNvPr id="10" name="Image 1" descr="/private/tmp/claude-501/-Users-pop7-Library-CloudStorage-OneDrive-MonsterConnectCo--Ltd-Lecture-KOSEN69---software-security/e6d6556f-17de-403d-a9a0-cf2f846149b4/scratchpad/tree/slides/pptx/assets/logo-small.png">    </p:cNvPr>
+          <p:cNvPr id="7" name="Image 2" descr="/private/tmp/claude-501/-Users-pop7-Library-CloudStorage-OneDrive-MonsterConnectCo--Ltd-Lecture-KOSEN69---software-security/2a5e410a-41e6-41b1-93e2-54cd05af23b3/scratchpad/KOSEN69 - software-security/slides/pptx/assets/logo-small.png">    </p:cNvPr>
           <p:cNvPicPr>
             <a:picLocks noChangeAspect="1"/>
           </p:cNvPicPr>
           <p:nvPr/>
         </p:nvPicPr>
         <p:blipFill>
-          <a:blip r:embed="rId2"/>
+          <a:blip r:embed="rId3"/>
           <a:stretch>
             <a:fillRect/>
           </a:stretch>
@@ -3464,7 +3692,7 @@
                 <a:ea typeface="Arial" pitchFamily="34" charset="-122"/>
                 <a:cs typeface="Arial" pitchFamily="34" charset="-120"/>
               </a:rPr>
-              <a:t>Key takeaways</a:t>
+              <a:t>The real fix: memory-safe languages</a:t>
             </a:r>
             <a:endParaRPr lang="en-US" sz="2600" dirty="0"/>
           </a:p>
@@ -3538,7 +3766,7 @@
                 <a:ea typeface="Calibri" pitchFamily="34" charset="-122"/>
                 <a:cs typeface="Calibri" pitchFamily="34" charset="-120"/>
               </a:rPr>
-              <a:t>Fuzz to find, debug to understand, mitigate to slow attackers</a:t>
+              <a:t>Rust / Go remove whole bug classes by design</a:t>
             </a:r>
             <a:endParaRPr lang="en-US" sz="1400" dirty="0"/>
           </a:p>
@@ -3559,7 +3787,7 @@
                 <a:ea typeface="Calibri" pitchFamily="34" charset="-122"/>
                 <a:cs typeface="Calibri" pitchFamily="34" charset="-120"/>
               </a:rPr>
-              <a:t>Mitigations ≠ cure — memory-safe languages are the cure</a:t>
+              <a:t>CISA "Secure by Design" + ONCD: move off C/C++ for new code</a:t>
             </a:r>
             <a:endParaRPr lang="en-US" sz="1400" dirty="0"/>
           </a:p>
@@ -3580,7 +3808,7 @@
                 <a:ea typeface="Calibri" pitchFamily="34" charset="-122"/>
                 <a:cs typeface="Calibri" pitchFamily="34" charset="-120"/>
               </a:rPr>
-              <a:t>This is where the industry is moving</a:t>
+              <a:t>Borrow checker / bounds checks = no overflow, no UAF</a:t>
             </a:r>
             <a:endParaRPr lang="en-US" sz="1400" dirty="0"/>
           </a:p>
@@ -3627,7 +3855,7 @@
       </p:sp>
       <p:pic>
         <p:nvPicPr>
-          <p:cNvPr id="8" name="Image 1" descr="/private/tmp/claude-501/-Users-pop7-Library-CloudStorage-OneDrive-MonsterConnectCo--Ltd-Lecture-KOSEN69---software-security/e6d6556f-17de-403d-a9a0-cf2f846149b4/scratchpad/tree/slides/pptx/assets/logo-small.png">    </p:cNvPr>
+          <p:cNvPr id="8" name="Image 1" descr="/private/tmp/claude-501/-Users-pop7-Library-CloudStorage-OneDrive-MonsterConnectCo--Ltd-Lecture-KOSEN69---software-security/2a5e410a-41e6-41b1-93e2-54cd05af23b3/scratchpad/KOSEN69 - software-security/slides/pptx/assets/logo-small.png">    </p:cNvPr>
           <p:cNvPicPr>
             <a:picLocks noChangeAspect="1"/>
           </p:cNvPicPr>
@@ -3683,14 +3911,65 @@
       </p:grpSpPr>
       <p:sp>
         <p:nvSpPr>
-          <p:cNvPr id="2" name="Text 0"/>
-          <p:cNvSpPr/>
-          <p:nvPr/>
-        </p:nvSpPr>
-        <p:spPr>
-          <a:xfrm>
-            <a:off x="640080" y="1737360"/>
-            <a:ext cx="7863840" cy="1097280"/>
+          <p:cNvPr id="2" name="Shape 0"/>
+          <p:cNvSpPr/>
+          <p:nvPr/>
+        </p:nvSpPr>
+        <p:spPr>
+          <a:xfrm>
+            <a:off x="457200" y="384048"/>
+            <a:ext cx="530352" cy="530352"/>
+          </a:xfrm>
+          <a:prstGeom prst="ellipse">
+            <a:avLst/>
+          </a:prstGeom>
+          <a:solidFill>
+            <a:srgbClr val="E35205"/>
+          </a:solidFill>
+          <a:ln/>
+          <a:effectLst>
+            <a:outerShdw sx="100000" sy="100000" kx="0" ky="0" algn="bl" rotWithShape="0" blurRad="76200" dist="25400" dir="5400000">
+              <a:srgbClr val="000000">
+                <a:alpha val="12000"/>
+              </a:srgbClr>
+            </a:outerShdw>
+          </a:effectLst>
+        </p:spPr>
+      </p:sp>
+      <p:pic>
+        <p:nvPicPr>
+          <p:cNvPr id="3" name="Image 0" descr="preencoded.png">    </p:cNvPr>
+          <p:cNvPicPr>
+            <a:picLocks noChangeAspect="1"/>
+          </p:cNvPicPr>
+          <p:nvPr/>
+        </p:nvPicPr>
+        <p:blipFill>
+          <a:blip r:embed="rId1"/>
+          <a:stretch>
+            <a:fillRect/>
+          </a:stretch>
+        </p:blipFill>
+        <p:spPr>
+          <a:xfrm>
+            <a:off x="594360" y="521208"/>
+            <a:ext cx="256032" cy="256032"/>
+          </a:xfrm>
+          <a:prstGeom prst="rect">
+            <a:avLst/>
+          </a:prstGeom>
+        </p:spPr>
+      </p:pic>
+      <p:sp>
+        <p:nvSpPr>
+          <p:cNvPr id="4" name="Text 1"/>
+          <p:cNvSpPr/>
+          <p:nvPr/>
+        </p:nvSpPr>
+        <p:spPr>
+          <a:xfrm>
+            <a:off x="1143000" y="329184"/>
+            <a:ext cx="7498080" cy="603504"/>
           </a:xfrm>
           <a:prstGeom prst="rect">
             <a:avLst/>
@@ -3706,7 +3985,7 @@
               <a:buNone/>
             </a:pPr>
             <a:r>
-              <a:rPr lang="en-US" sz="4600" b="1" dirty="0">
+              <a:rPr lang="en-US" sz="2600" b="1" dirty="0">
                 <a:solidFill>
                   <a:srgbClr val="1F2937"/>
                 </a:solidFill>
@@ -3714,22 +3993,46 @@
                 <a:ea typeface="Arial" pitchFamily="34" charset="-122"/>
                 <a:cs typeface="Arial" pitchFamily="34" charset="-120"/>
               </a:rPr>
-              <a:t>Questions?</a:t>
-            </a:r>
-            <a:endParaRPr lang="en-US" sz="4600" dirty="0"/>
-          </a:p>
-        </p:txBody>
-      </p:sp>
-      <p:sp>
-        <p:nvSpPr>
-          <p:cNvPr id="3" name="Text 1"/>
-          <p:cNvSpPr/>
-          <p:nvPr/>
-        </p:nvSpPr>
-        <p:spPr>
-          <a:xfrm>
-            <a:off x="658368" y="2834640"/>
-            <a:ext cx="7863840" cy="731520"/>
+              <a:t>The real fix: memory-safe languages (cont.)</a:t>
+            </a:r>
+            <a:endParaRPr lang="en-US" sz="2600" dirty="0"/>
+          </a:p>
+        </p:txBody>
+      </p:sp>
+      <p:pic>
+        <p:nvPicPr>
+          <p:cNvPr id="5" name="Image 1" descr="Two columns contrasting how C/C++ and memory-safe languages treat the same bug family. In C/C++ you manage memory by hand with no automatic checks, so a whole family is possible — buffer overflow (CWE-121), out-of-bounds write (CWE-787), use-after-free, format string (CWE-134) — and the mitigations (canary, ASLR, PIE, NX, FORTIFY) only raise the cost of exploiting the bug while the bug still compiles and ships, a treadmill where the class never goes away. In Rust/Go the language manages memory for you: the borrow checker enforces lifetimes and arrays are bounds-checked, so an overflow or use-after-free becomes a compile error or a safe panic — the class is removed, not patched, because the unsafe write never reaches the machine. Mitigations are a treadmill; a memory-safe language ends the race, which is why CISA Secure by Design and the US ONCD both call for moving off C/C++ for new code.">    </p:cNvPr>
+          <p:cNvPicPr>
+            <a:picLocks noChangeAspect="1"/>
+          </p:cNvPicPr>
+          <p:nvPr/>
+        </p:nvPicPr>
+        <p:blipFill>
+          <a:blip r:embed="rId2"/>
+          <a:stretch>
+            <a:fillRect/>
+          </a:stretch>
+        </p:blipFill>
+        <p:spPr>
+          <a:xfrm>
+            <a:off x="1409109" y="1097280"/>
+            <a:ext cx="6325783" cy="3566160"/>
+          </a:xfrm>
+          <a:prstGeom prst="rect">
+            <a:avLst/>
+          </a:prstGeom>
+        </p:spPr>
+      </p:pic>
+      <p:sp>
+        <p:nvSpPr>
+          <p:cNvPr id="6" name="Text 2"/>
+          <p:cNvSpPr/>
+          <p:nvPr/>
+        </p:nvSpPr>
+        <p:spPr>
+          <a:xfrm>
+            <a:off x="457200" y="4800600"/>
+            <a:ext cx="6949440" cy="274320"/>
           </a:xfrm>
           <a:prstGeom prst="rect">
             <a:avLst/>
@@ -3745,23 +4048,1328 @@
               <a:buNone/>
             </a:pPr>
             <a:r>
-              <a:rPr lang="en-US" sz="1800" dirty="0">
-                <a:solidFill>
-                  <a:srgbClr val="E35205"/>
+              <a:rPr lang="en-US" sz="900" dirty="0">
+                <a:solidFill>
+                  <a:srgbClr val="64748B"/>
                 </a:solidFill>
                 <a:latin typeface="Calibri" pitchFamily="34" charset="0"/>
                 <a:ea typeface="Calibri" pitchFamily="34" charset="-122"/>
                 <a:cs typeface="Calibri" pitchFamily="34" charset="-120"/>
               </a:rPr>
-              <a:t>Next week: Software supply-chain security</a:t>
-            </a:r>
-            <a:endParaRPr lang="en-US" sz="1800" dirty="0"/>
+              <a:t>Software Security · Week 11</a:t>
+            </a:r>
+            <a:endParaRPr lang="en-US" sz="900" dirty="0"/>
           </a:p>
         </p:txBody>
       </p:sp>
       <p:pic>
         <p:nvPicPr>
-          <p:cNvPr id="4" name="Image 0" descr="/private/tmp/claude-501/-Users-pop7-Library-CloudStorage-OneDrive-MonsterConnectCo--Ltd-Lecture-KOSEN69---software-security/e6d6556f-17de-403d-a9a0-cf2f846149b4/scratchpad/tree/slides/pptx/assets/logo-small.png">    </p:cNvPr>
+          <p:cNvPr id="7" name="Image 2" descr="/private/tmp/claude-501/-Users-pop7-Library-CloudStorage-OneDrive-MonsterConnectCo--Ltd-Lecture-KOSEN69---software-security/2a5e410a-41e6-41b1-93e2-54cd05af23b3/scratchpad/KOSEN69 - software-security/slides/pptx/assets/logo-small.png">    </p:cNvPr>
+          <p:cNvPicPr>
+            <a:picLocks noChangeAspect="1"/>
+          </p:cNvPicPr>
+          <p:nvPr/>
+        </p:nvPicPr>
+        <p:blipFill>
+          <a:blip r:embed="rId3"/>
+          <a:stretch>
+            <a:fillRect/>
+          </a:stretch>
+        </p:blipFill>
+        <p:spPr>
+          <a:xfrm>
+            <a:off x="7882128" y="4700016"/>
+            <a:ext cx="768096" cy="356616"/>
+          </a:xfrm>
+          <a:prstGeom prst="rect">
+            <a:avLst/>
+          </a:prstGeom>
+        </p:spPr>
+      </p:pic>
+    </p:spTree>
+  </p:cSld>
+  <p:clrMapOvr>
+    <a:masterClrMapping/>
+  </p:clrMapOvr>
+</p:sld>
+</file>
+
+<file path=ppt/slides/slide15.xml><?xml version="1.0" encoding="utf-8"?>
+<p:sld xmlns:a="http://schemas.openxmlformats.org/drawingml/2006/main" xmlns:r="http://schemas.openxmlformats.org/officeDocument/2006/relationships" xmlns:p="http://schemas.openxmlformats.org/presentationml/2006/main">
+  <p:cSld name="Slide 15">
+    <p:bg>
+      <p:bgPr>
+        <a:solidFill>
+          <a:srgbClr val="FFFFFF"/>
+        </a:solidFill>
+      </p:bgPr>
+    </p:bg>
+    <p:spTree>
+      <p:nvGrpSpPr>
+        <p:cNvPr id="1" name=""/>
+        <p:cNvGrpSpPr/>
+        <p:nvPr/>
+      </p:nvGrpSpPr>
+      <p:grpSpPr>
+        <a:xfrm>
+          <a:off x="0" y="0"/>
+          <a:ext cx="0" cy="0"/>
+          <a:chOff x="0" y="0"/>
+          <a:chExt cx="0" cy="0"/>
+        </a:xfrm>
+      </p:grpSpPr>
+      <p:sp>
+        <p:nvSpPr>
+          <p:cNvPr id="2" name="Shape 0"/>
+          <p:cNvSpPr/>
+          <p:nvPr/>
+        </p:nvSpPr>
+        <p:spPr>
+          <a:xfrm>
+            <a:off x="457200" y="384048"/>
+            <a:ext cx="530352" cy="530352"/>
+          </a:xfrm>
+          <a:prstGeom prst="ellipse">
+            <a:avLst/>
+          </a:prstGeom>
+          <a:solidFill>
+            <a:srgbClr val="E35205"/>
+          </a:solidFill>
+          <a:ln/>
+          <a:effectLst>
+            <a:outerShdw sx="100000" sy="100000" kx="0" ky="0" algn="bl" rotWithShape="0" blurRad="76200" dist="25400" dir="5400000">
+              <a:srgbClr val="000000">
+                <a:alpha val="12000"/>
+              </a:srgbClr>
+            </a:outerShdw>
+          </a:effectLst>
+        </p:spPr>
+      </p:sp>
+      <p:pic>
+        <p:nvPicPr>
+          <p:cNvPr id="3" name="Image 0" descr="preencoded.png">    </p:cNvPr>
+          <p:cNvPicPr>
+            <a:picLocks noChangeAspect="1"/>
+          </p:cNvPicPr>
+          <p:nvPr/>
+        </p:nvPicPr>
+        <p:blipFill>
+          <a:blip r:embed="rId1"/>
+          <a:stretch>
+            <a:fillRect/>
+          </a:stretch>
+        </p:blipFill>
+        <p:spPr>
+          <a:xfrm>
+            <a:off x="594360" y="521208"/>
+            <a:ext cx="256032" cy="256032"/>
+          </a:xfrm>
+          <a:prstGeom prst="rect">
+            <a:avLst/>
+          </a:prstGeom>
+        </p:spPr>
+      </p:pic>
+      <p:sp>
+        <p:nvSpPr>
+          <p:cNvPr id="4" name="Text 1"/>
+          <p:cNvSpPr/>
+          <p:nvPr/>
+        </p:nvSpPr>
+        <p:spPr>
+          <a:xfrm>
+            <a:off x="1143000" y="329184"/>
+            <a:ext cx="7498080" cy="603504"/>
+          </a:xfrm>
+          <a:prstGeom prst="rect">
+            <a:avLst/>
+          </a:prstGeom>
+          <a:noFill/>
+          <a:ln/>
+        </p:spPr>
+        <p:txBody>
+          <a:bodyPr wrap="square" lIns="0" tIns="0" rIns="0" bIns="0" rtlCol="0" anchor="ctr"/>
+          <a:lstStyle/>
+          <a:p>
+            <a:pPr indent="0" marL="0">
+              <a:buNone/>
+            </a:pPr>
+            <a:r>
+              <a:rPr lang="en-US" sz="2600" b="1" dirty="0">
+                <a:solidFill>
+                  <a:srgbClr val="1F2937"/>
+                </a:solidFill>
+                <a:latin typeface="Arial" pitchFamily="34" charset="0"/>
+                <a:ea typeface="Arial" pitchFamily="34" charset="-122"/>
+                <a:cs typeface="Arial" pitchFamily="34" charset="-120"/>
+              </a:rPr>
+              <a:t>💥 Game — Fuzzing Race → Pwn the Binary</a:t>
+            </a:r>
+            <a:endParaRPr lang="en-US" sz="2600" dirty="0"/>
+          </a:p>
+        </p:txBody>
+      </p:sp>
+      <p:sp>
+        <p:nvSpPr>
+          <p:cNvPr id="5" name="Shape 2"/>
+          <p:cNvSpPr/>
+          <p:nvPr/>
+        </p:nvSpPr>
+        <p:spPr>
+          <a:xfrm>
+            <a:off x="502920" y="1325880"/>
+            <a:ext cx="384048" cy="384048"/>
+          </a:xfrm>
+          <a:prstGeom prst="ellipse">
+            <a:avLst/>
+          </a:prstGeom>
+          <a:solidFill>
+            <a:srgbClr val="E35205"/>
+          </a:solidFill>
+          <a:ln/>
+        </p:spPr>
+      </p:sp>
+      <p:sp>
+        <p:nvSpPr>
+          <p:cNvPr id="6" name="Text 3"/>
+          <p:cNvSpPr/>
+          <p:nvPr/>
+        </p:nvSpPr>
+        <p:spPr>
+          <a:xfrm>
+            <a:off x="502920" y="1325880"/>
+            <a:ext cx="384048" cy="384048"/>
+          </a:xfrm>
+          <a:prstGeom prst="rect">
+            <a:avLst/>
+          </a:prstGeom>
+          <a:noFill/>
+          <a:ln/>
+        </p:spPr>
+        <p:txBody>
+          <a:bodyPr wrap="square" lIns="0" tIns="0" rIns="0" bIns="0" rtlCol="0" anchor="ctr"/>
+          <a:lstStyle/>
+          <a:p>
+            <a:pPr algn="ctr" indent="0" marL="0">
+              <a:buNone/>
+            </a:pPr>
+            <a:r>
+              <a:rPr lang="en-US" sz="1500" b="1" dirty="0">
+                <a:solidFill>
+                  <a:srgbClr val="0E1726"/>
+                </a:solidFill>
+                <a:latin typeface="Arial" pitchFamily="34" charset="0"/>
+                <a:ea typeface="Arial" pitchFamily="34" charset="-122"/>
+                <a:cs typeface="Arial" pitchFamily="34" charset="-120"/>
+              </a:rPr>
+              <a:t>1</a:t>
+            </a:r>
+            <a:endParaRPr lang="en-US" sz="1500" dirty="0"/>
+          </a:p>
+        </p:txBody>
+      </p:sp>
+      <p:sp>
+        <p:nvSpPr>
+          <p:cNvPr id="7" name="Text 4"/>
+          <p:cNvSpPr/>
+          <p:nvPr/>
+        </p:nvSpPr>
+        <p:spPr>
+          <a:xfrm>
+            <a:off x="1051560" y="1325880"/>
+            <a:ext cx="7589520" cy="402336"/>
+          </a:xfrm>
+          <a:prstGeom prst="rect">
+            <a:avLst/>
+          </a:prstGeom>
+          <a:noFill/>
+          <a:ln/>
+        </p:spPr>
+        <p:txBody>
+          <a:bodyPr wrap="square" lIns="0" tIns="0" rIns="0" bIns="0" rtlCol="0" anchor="ctr">
+            <a:normAutofit/>
+          </a:bodyPr>
+          <a:lstStyle/>
+          <a:p>
+            <a:pPr indent="0" marL="0">
+              <a:buNone/>
+            </a:pPr>
+            <a:r>
+              <a:rPr lang="en-US" sz="1350" dirty="0">
+                <a:solidFill>
+                  <a:srgbClr val="1F2937"/>
+                </a:solidFill>
+                <a:latin typeface="Calibri" pitchFamily="34" charset="0"/>
+                <a:ea typeface="Calibri" pitchFamily="34" charset="-122"/>
+                <a:cs typeface="Calibri" pitchFamily="34" charset="-120"/>
+              </a:rPr>
+              <a:t>Round 1 (Fuzzing Race): first team to crash the target wins</a:t>
+            </a:r>
+            <a:endParaRPr lang="en-US" sz="1350" dirty="0"/>
+          </a:p>
+        </p:txBody>
+      </p:sp>
+      <p:sp>
+        <p:nvSpPr>
+          <p:cNvPr id="8" name="Shape 5"/>
+          <p:cNvSpPr/>
+          <p:nvPr/>
+        </p:nvSpPr>
+        <p:spPr>
+          <a:xfrm>
+            <a:off x="502920" y="1801368"/>
+            <a:ext cx="384048" cy="384048"/>
+          </a:xfrm>
+          <a:prstGeom prst="ellipse">
+            <a:avLst/>
+          </a:prstGeom>
+          <a:solidFill>
+            <a:srgbClr val="E35205"/>
+          </a:solidFill>
+          <a:ln/>
+        </p:spPr>
+      </p:sp>
+      <p:sp>
+        <p:nvSpPr>
+          <p:cNvPr id="9" name="Text 6"/>
+          <p:cNvSpPr/>
+          <p:nvPr/>
+        </p:nvSpPr>
+        <p:spPr>
+          <a:xfrm>
+            <a:off x="502920" y="1801368"/>
+            <a:ext cx="384048" cy="384048"/>
+          </a:xfrm>
+          <a:prstGeom prst="rect">
+            <a:avLst/>
+          </a:prstGeom>
+          <a:noFill/>
+          <a:ln/>
+        </p:spPr>
+        <p:txBody>
+          <a:bodyPr wrap="square" lIns="0" tIns="0" rIns="0" bIns="0" rtlCol="0" anchor="ctr"/>
+          <a:lstStyle/>
+          <a:p>
+            <a:pPr algn="ctr" indent="0" marL="0">
+              <a:buNone/>
+            </a:pPr>
+            <a:r>
+              <a:rPr lang="en-US" sz="1500" b="1" dirty="0">
+                <a:solidFill>
+                  <a:srgbClr val="0E1726"/>
+                </a:solidFill>
+                <a:latin typeface="Arial" pitchFamily="34" charset="0"/>
+                <a:ea typeface="Arial" pitchFamily="34" charset="-122"/>
+                <a:cs typeface="Arial" pitchFamily="34" charset="-120"/>
+              </a:rPr>
+              <a:t>2</a:t>
+            </a:r>
+            <a:endParaRPr lang="en-US" sz="1500" dirty="0"/>
+          </a:p>
+        </p:txBody>
+      </p:sp>
+      <p:sp>
+        <p:nvSpPr>
+          <p:cNvPr id="10" name="Text 7"/>
+          <p:cNvSpPr/>
+          <p:nvPr/>
+        </p:nvSpPr>
+        <p:spPr>
+          <a:xfrm>
+            <a:off x="1051560" y="1801368"/>
+            <a:ext cx="7589520" cy="402336"/>
+          </a:xfrm>
+          <a:prstGeom prst="rect">
+            <a:avLst/>
+          </a:prstGeom>
+          <a:noFill/>
+          <a:ln/>
+        </p:spPr>
+        <p:txBody>
+          <a:bodyPr wrap="square" lIns="0" tIns="0" rIns="0" bIns="0" rtlCol="0" anchor="ctr">
+            <a:normAutofit/>
+          </a:bodyPr>
+          <a:lstStyle/>
+          <a:p>
+            <a:pPr indent="0" marL="0">
+              <a:buNone/>
+            </a:pPr>
+            <a:r>
+              <a:rPr lang="en-US" sz="1350" dirty="0">
+                <a:solidFill>
+                  <a:srgbClr val="1F2937"/>
+                </a:solidFill>
+                <a:latin typeface="Calibri" pitchFamily="34" charset="0"/>
+                <a:ea typeface="Calibri" pitchFamily="34" charset="-122"/>
+                <a:cs typeface="Calibri" pitchFamily="34" charset="-120"/>
+              </a:rPr>
+              <a:t>Round 2 (Pwn): exploit the overflow / format string</a:t>
+            </a:r>
+            <a:endParaRPr lang="en-US" sz="1350" dirty="0"/>
+          </a:p>
+        </p:txBody>
+      </p:sp>
+      <p:sp>
+        <p:nvSpPr>
+          <p:cNvPr id="11" name="Shape 8"/>
+          <p:cNvSpPr/>
+          <p:nvPr/>
+        </p:nvSpPr>
+        <p:spPr>
+          <a:xfrm>
+            <a:off x="502920" y="2276856"/>
+            <a:ext cx="384048" cy="384048"/>
+          </a:xfrm>
+          <a:prstGeom prst="ellipse">
+            <a:avLst/>
+          </a:prstGeom>
+          <a:solidFill>
+            <a:srgbClr val="E35205"/>
+          </a:solidFill>
+          <a:ln/>
+        </p:spPr>
+      </p:sp>
+      <p:sp>
+        <p:nvSpPr>
+          <p:cNvPr id="12" name="Text 9"/>
+          <p:cNvSpPr/>
+          <p:nvPr/>
+        </p:nvSpPr>
+        <p:spPr>
+          <a:xfrm>
+            <a:off x="502920" y="2276856"/>
+            <a:ext cx="384048" cy="384048"/>
+          </a:xfrm>
+          <a:prstGeom prst="rect">
+            <a:avLst/>
+          </a:prstGeom>
+          <a:noFill/>
+          <a:ln/>
+        </p:spPr>
+        <p:txBody>
+          <a:bodyPr wrap="square" lIns="0" tIns="0" rIns="0" bIns="0" rtlCol="0" anchor="ctr"/>
+          <a:lstStyle/>
+          <a:p>
+            <a:pPr algn="ctr" indent="0" marL="0">
+              <a:buNone/>
+            </a:pPr>
+            <a:r>
+              <a:rPr lang="en-US" sz="1500" b="1" dirty="0">
+                <a:solidFill>
+                  <a:srgbClr val="0E1726"/>
+                </a:solidFill>
+                <a:latin typeface="Arial" pitchFamily="34" charset="0"/>
+                <a:ea typeface="Arial" pitchFamily="34" charset="-122"/>
+                <a:cs typeface="Arial" pitchFamily="34" charset="-120"/>
+              </a:rPr>
+              <a:t>3</a:t>
+            </a:r>
+            <a:endParaRPr lang="en-US" sz="1500" dirty="0"/>
+          </a:p>
+        </p:txBody>
+      </p:sp>
+      <p:sp>
+        <p:nvSpPr>
+          <p:cNvPr id="13" name="Text 10"/>
+          <p:cNvSpPr/>
+          <p:nvPr/>
+        </p:nvSpPr>
+        <p:spPr>
+          <a:xfrm>
+            <a:off x="1051560" y="2276856"/>
+            <a:ext cx="7589520" cy="402336"/>
+          </a:xfrm>
+          <a:prstGeom prst="rect">
+            <a:avLst/>
+          </a:prstGeom>
+          <a:noFill/>
+          <a:ln/>
+        </p:spPr>
+        <p:txBody>
+          <a:bodyPr wrap="square" lIns="0" tIns="0" rIns="0" bIns="0" rtlCol="0" anchor="ctr">
+            <a:normAutofit/>
+          </a:bodyPr>
+          <a:lstStyle/>
+          <a:p>
+            <a:pPr indent="0" marL="0">
+              <a:buNone/>
+            </a:pPr>
+            <a:r>
+              <a:rPr lang="en-US" sz="1350" dirty="0">
+                <a:solidFill>
+                  <a:srgbClr val="1F2937"/>
+                </a:solidFill>
+                <a:latin typeface="Calibri" pitchFamily="34" charset="0"/>
+                <a:ea typeface="Calibri" pitchFamily="34" charset="-122"/>
+                <a:cs typeface="Calibri" pitchFamily="34" charset="-120"/>
+              </a:rPr>
+              <a:t>Round 3 (Defend): rebuild with canary+ASLR+PIE, then rewrite in Rust</a:t>
+            </a:r>
+            <a:endParaRPr lang="en-US" sz="1350" dirty="0"/>
+          </a:p>
+        </p:txBody>
+      </p:sp>
+      <p:sp>
+        <p:nvSpPr>
+          <p:cNvPr id="14" name="Text 11"/>
+          <p:cNvSpPr/>
+          <p:nvPr/>
+        </p:nvSpPr>
+        <p:spPr>
+          <a:xfrm>
+            <a:off x="457200" y="4800600"/>
+            <a:ext cx="6949440" cy="274320"/>
+          </a:xfrm>
+          <a:prstGeom prst="rect">
+            <a:avLst/>
+          </a:prstGeom>
+          <a:noFill/>
+          <a:ln/>
+        </p:spPr>
+        <p:txBody>
+          <a:bodyPr wrap="square" lIns="0" tIns="0" rIns="0" bIns="0" rtlCol="0" anchor="ctr"/>
+          <a:lstStyle/>
+          <a:p>
+            <a:pPr indent="0" marL="0">
+              <a:buNone/>
+            </a:pPr>
+            <a:r>
+              <a:rPr lang="en-US" sz="900" dirty="0">
+                <a:solidFill>
+                  <a:srgbClr val="64748B"/>
+                </a:solidFill>
+                <a:latin typeface="Calibri" pitchFamily="34" charset="0"/>
+                <a:ea typeface="Calibri" pitchFamily="34" charset="-122"/>
+                <a:cs typeface="Calibri" pitchFamily="34" charset="-120"/>
+              </a:rPr>
+              <a:t>Software Security · Week 11</a:t>
+            </a:r>
+            <a:endParaRPr lang="en-US" sz="900" dirty="0"/>
+          </a:p>
+        </p:txBody>
+      </p:sp>
+      <p:pic>
+        <p:nvPicPr>
+          <p:cNvPr id="15" name="Image 1" descr="/private/tmp/claude-501/-Users-pop7-Library-CloudStorage-OneDrive-MonsterConnectCo--Ltd-Lecture-KOSEN69---software-security/2a5e410a-41e6-41b1-93e2-54cd05af23b3/scratchpad/KOSEN69 - software-security/slides/pptx/assets/logo-small.png">    </p:cNvPr>
+          <p:cNvPicPr>
+            <a:picLocks noChangeAspect="1"/>
+          </p:cNvPicPr>
+          <p:nvPr/>
+        </p:nvPicPr>
+        <p:blipFill>
+          <a:blip r:embed="rId2"/>
+          <a:stretch>
+            <a:fillRect/>
+          </a:stretch>
+        </p:blipFill>
+        <p:spPr>
+          <a:xfrm>
+            <a:off x="7882128" y="4700016"/>
+            <a:ext cx="768096" cy="356616"/>
+          </a:xfrm>
+          <a:prstGeom prst="rect">
+            <a:avLst/>
+          </a:prstGeom>
+        </p:spPr>
+      </p:pic>
+    </p:spTree>
+  </p:cSld>
+  <p:clrMapOvr>
+    <a:masterClrMapping/>
+  </p:clrMapOvr>
+</p:sld>
+</file>
+
+<file path=ppt/slides/slide16.xml><?xml version="1.0" encoding="utf-8"?>
+<p:sld xmlns:a="http://schemas.openxmlformats.org/drawingml/2006/main" xmlns:r="http://schemas.openxmlformats.org/officeDocument/2006/relationships" xmlns:p="http://schemas.openxmlformats.org/presentationml/2006/main">
+  <p:cSld name="Slide 16">
+    <p:bg>
+      <p:bgPr>
+        <a:solidFill>
+          <a:srgbClr val="FFFFFF"/>
+        </a:solidFill>
+      </p:bgPr>
+    </p:bg>
+    <p:spTree>
+      <p:nvGrpSpPr>
+        <p:cNvPr id="1" name=""/>
+        <p:cNvGrpSpPr/>
+        <p:nvPr/>
+      </p:nvGrpSpPr>
+      <p:grpSpPr>
+        <a:xfrm>
+          <a:off x="0" y="0"/>
+          <a:ext cx="0" cy="0"/>
+          <a:chOff x="0" y="0"/>
+          <a:chExt cx="0" cy="0"/>
+        </a:xfrm>
+      </p:grpSpPr>
+      <p:sp>
+        <p:nvSpPr>
+          <p:cNvPr id="2" name="Shape 0"/>
+          <p:cNvSpPr/>
+          <p:nvPr/>
+        </p:nvSpPr>
+        <p:spPr>
+          <a:xfrm>
+            <a:off x="457200" y="384048"/>
+            <a:ext cx="530352" cy="530352"/>
+          </a:xfrm>
+          <a:prstGeom prst="ellipse">
+            <a:avLst/>
+          </a:prstGeom>
+          <a:solidFill>
+            <a:srgbClr val="E35205"/>
+          </a:solidFill>
+          <a:ln/>
+          <a:effectLst>
+            <a:outerShdw sx="100000" sy="100000" kx="0" ky="0" algn="bl" rotWithShape="0" blurRad="76200" dist="25400" dir="5400000">
+              <a:srgbClr val="000000">
+                <a:alpha val="12000"/>
+              </a:srgbClr>
+            </a:outerShdw>
+          </a:effectLst>
+        </p:spPr>
+      </p:sp>
+      <p:pic>
+        <p:nvPicPr>
+          <p:cNvPr id="3" name="Image 0" descr="preencoded.png">    </p:cNvPr>
+          <p:cNvPicPr>
+            <a:picLocks noChangeAspect="1"/>
+          </p:cNvPicPr>
+          <p:nvPr/>
+        </p:nvPicPr>
+        <p:blipFill>
+          <a:blip r:embed="rId1"/>
+          <a:stretch>
+            <a:fillRect/>
+          </a:stretch>
+        </p:blipFill>
+        <p:spPr>
+          <a:xfrm>
+            <a:off x="594360" y="521208"/>
+            <a:ext cx="256032" cy="256032"/>
+          </a:xfrm>
+          <a:prstGeom prst="rect">
+            <a:avLst/>
+          </a:prstGeom>
+        </p:spPr>
+      </p:pic>
+      <p:sp>
+        <p:nvSpPr>
+          <p:cNvPr id="4" name="Text 1"/>
+          <p:cNvSpPr/>
+          <p:nvPr/>
+        </p:nvSpPr>
+        <p:spPr>
+          <a:xfrm>
+            <a:off x="1143000" y="329184"/>
+            <a:ext cx="7498080" cy="603504"/>
+          </a:xfrm>
+          <a:prstGeom prst="rect">
+            <a:avLst/>
+          </a:prstGeom>
+          <a:noFill/>
+          <a:ln/>
+        </p:spPr>
+        <p:txBody>
+          <a:bodyPr wrap="square" lIns="0" tIns="0" rIns="0" bIns="0" rtlCol="0" anchor="ctr"/>
+          <a:lstStyle/>
+          <a:p>
+            <a:pPr indent="0" marL="0">
+              <a:buNone/>
+            </a:pPr>
+            <a:r>
+              <a:rPr lang="en-US" sz="2600" b="1" dirty="0">
+                <a:solidFill>
+                  <a:srgbClr val="1F2937"/>
+                </a:solidFill>
+                <a:latin typeface="Arial" pitchFamily="34" charset="0"/>
+                <a:ea typeface="Arial" pitchFamily="34" charset="-122"/>
+                <a:cs typeface="Arial" pitchFamily="34" charset="-120"/>
+              </a:rPr>
+              <a:t>Deliverable</a:t>
+            </a:r>
+            <a:endParaRPr lang="en-US" sz="2600" dirty="0"/>
+          </a:p>
+        </p:txBody>
+      </p:sp>
+      <p:sp>
+        <p:nvSpPr>
+          <p:cNvPr id="5" name="Shape 2"/>
+          <p:cNvSpPr/>
+          <p:nvPr/>
+        </p:nvSpPr>
+        <p:spPr>
+          <a:xfrm>
+            <a:off x="457200" y="1325880"/>
+            <a:ext cx="8229600" cy="1097280"/>
+          </a:xfrm>
+          <a:prstGeom prst="roundRect">
+            <a:avLst>
+              <a:gd name="adj" fmla="val 6667"/>
+            </a:avLst>
+          </a:prstGeom>
+          <a:solidFill>
+            <a:srgbClr val="E8EDF3"/>
+          </a:solidFill>
+          <a:ln/>
+        </p:spPr>
+      </p:sp>
+      <p:sp>
+        <p:nvSpPr>
+          <p:cNvPr id="6" name="Text 3"/>
+          <p:cNvSpPr/>
+          <p:nvPr/>
+        </p:nvSpPr>
+        <p:spPr>
+          <a:xfrm>
+            <a:off x="731520" y="1325880"/>
+            <a:ext cx="7680960" cy="1097280"/>
+          </a:xfrm>
+          <a:prstGeom prst="rect">
+            <a:avLst/>
+          </a:prstGeom>
+          <a:noFill/>
+          <a:ln/>
+        </p:spPr>
+        <p:txBody>
+          <a:bodyPr wrap="square" lIns="0" tIns="0" rIns="0" bIns="0" rtlCol="0" anchor="ctr">
+            <a:normAutofit/>
+          </a:bodyPr>
+          <a:lstStyle/>
+          <a:p>
+            <a:pPr indent="0" marL="0">
+              <a:buNone/>
+            </a:pPr>
+            <a:r>
+              <a:rPr lang="en-US" sz="1400" i="1" dirty="0">
+                <a:solidFill>
+                  <a:srgbClr val="E35205"/>
+                </a:solidFill>
+                <a:latin typeface="Calibri" pitchFamily="34" charset="0"/>
+                <a:ea typeface="Calibri" pitchFamily="34" charset="-122"/>
+                <a:cs typeface="Calibri" pitchFamily="34" charset="-120"/>
+              </a:rPr>
+              <a:t>📋 Worksheet 11 — labs/week11-memory-safety-exploitation/worksheet.md (Part 3) · kickoff: in the toolbox container (labs/toolbox — Apple clang has no libFuzzer runtime): clang -g -fsanitize=address,fuzzer fuzz_harness.c -o fuzz &amp;&amp; ./fuzz</a:t>
+            </a:r>
+            <a:endParaRPr lang="en-US" sz="1400" dirty="0"/>
+          </a:p>
+        </p:txBody>
+      </p:sp>
+      <p:sp>
+        <p:nvSpPr>
+          <p:cNvPr id="7" name="Shape 4"/>
+          <p:cNvSpPr/>
+          <p:nvPr/>
+        </p:nvSpPr>
+        <p:spPr>
+          <a:xfrm>
+            <a:off x="457200" y="2587752"/>
+            <a:ext cx="8229600" cy="1517904"/>
+          </a:xfrm>
+          <a:prstGeom prst="roundRect">
+            <a:avLst>
+              <a:gd name="adj" fmla="val 4819"/>
+            </a:avLst>
+          </a:prstGeom>
+          <a:solidFill>
+            <a:srgbClr val="F1F5F9"/>
+          </a:solidFill>
+          <a:ln/>
+          <a:effectLst>
+            <a:outerShdw sx="100000" sy="100000" kx="0" ky="0" algn="bl" rotWithShape="0" blurRad="76200" dist="25400" dir="5400000">
+              <a:srgbClr val="000000">
+                <a:alpha val="12000"/>
+              </a:srgbClr>
+            </a:outerShdw>
+          </a:effectLst>
+        </p:spPr>
+      </p:sp>
+      <p:sp>
+        <p:nvSpPr>
+          <p:cNvPr id="8" name="Text 5"/>
+          <p:cNvSpPr/>
+          <p:nvPr/>
+        </p:nvSpPr>
+        <p:spPr>
+          <a:xfrm>
+            <a:off x="731520" y="2697480"/>
+            <a:ext cx="7680960" cy="1298448"/>
+          </a:xfrm>
+          <a:prstGeom prst="rect">
+            <a:avLst/>
+          </a:prstGeom>
+          <a:noFill/>
+          <a:ln/>
+        </p:spPr>
+        <p:txBody>
+          <a:bodyPr wrap="square" lIns="0" tIns="0" rIns="0" bIns="0" rtlCol="0" anchor="t">
+            <a:normAutofit/>
+          </a:bodyPr>
+          <a:lstStyle/>
+          <a:p>
+            <a:pPr marL="342900" indent="-342900">
+              <a:spcAft>
+                <a:spcPts val="600"/>
+              </a:spcAft>
+              <a:buSzPct val="100000"/>
+              <a:buChar char="•"/>
+            </a:pPr>
+            <a:r>
+              <a:rPr lang="en-US" sz="1400" dirty="0">
+                <a:solidFill>
+                  <a:srgbClr val="1F2937"/>
+                </a:solidFill>
+                <a:latin typeface="Calibri" pitchFamily="34" charset="0"/>
+                <a:ea typeface="Calibri" pitchFamily="34" charset="-122"/>
+                <a:cs typeface="Calibri" pitchFamily="34" charset="-120"/>
+              </a:rPr>
+              <a:t>Fuzzing crash + exploit script</a:t>
+            </a:r>
+            <a:endParaRPr lang="en-US" sz="1400" dirty="0"/>
+          </a:p>
+          <a:p>
+            <a:pPr marL="342900" indent="-342900">
+              <a:spcAft>
+                <a:spcPts val="600"/>
+              </a:spcAft>
+              <a:buSzPct val="100000"/>
+              <a:buChar char="•"/>
+            </a:pPr>
+            <a:r>
+              <a:rPr lang="en-US" sz="1400" dirty="0">
+                <a:solidFill>
+                  <a:srgbClr val="1F2937"/>
+                </a:solidFill>
+                <a:latin typeface="Calibri" pitchFamily="34" charset="0"/>
+                <a:ea typeface="Calibri" pitchFamily="34" charset="-122"/>
+                <a:cs typeface="Calibri" pitchFamily="34" charset="-120"/>
+              </a:rPr>
+              <a:t>Annotated Ghidra/gdb analysis</a:t>
+            </a:r>
+            <a:endParaRPr lang="en-US" sz="1400" dirty="0"/>
+          </a:p>
+          <a:p>
+            <a:pPr marL="342900" indent="-342900">
+              <a:spcAft>
+                <a:spcPts val="600"/>
+              </a:spcAft>
+              <a:buSzPct val="100000"/>
+              <a:buChar char="•"/>
+            </a:pPr>
+            <a:r>
+              <a:rPr lang="en-US" sz="1400" dirty="0">
+                <a:solidFill>
+                  <a:srgbClr val="1F2937"/>
+                </a:solidFill>
+                <a:latin typeface="Calibri" pitchFamily="34" charset="0"/>
+                <a:ea typeface="Calibri" pitchFamily="34" charset="-122"/>
+                <a:cs typeface="Calibri" pitchFamily="34" charset="-120"/>
+              </a:rPr>
+              <a:t>Memory-safe (Rust) rewrite + why the bug is now impossible</a:t>
+            </a:r>
+            <a:endParaRPr lang="en-US" sz="1400" dirty="0"/>
+          </a:p>
+          <a:p>
+            <a:pPr marL="342900" indent="-342900">
+              <a:spcAft>
+                <a:spcPts val="600"/>
+              </a:spcAft>
+              <a:buSzPct val="100000"/>
+              <a:buChar char="•"/>
+            </a:pPr>
+            <a:r>
+              <a:rPr lang="en-US" sz="1400" dirty="0">
+                <a:solidFill>
+                  <a:srgbClr val="1F2937"/>
+                </a:solidFill>
+                <a:latin typeface="Calibri" pitchFamily="34" charset="0"/>
+                <a:ea typeface="Calibri" pitchFamily="34" charset="-122"/>
+                <a:cs typeface="Calibri" pitchFamily="34" charset="-120"/>
+              </a:rPr>
+              <a:t>+ Audit the AI / EiPE / Prompt Problem (see worksheet)</a:t>
+            </a:r>
+            <a:endParaRPr lang="en-US" sz="1400" dirty="0"/>
+          </a:p>
+        </p:txBody>
+      </p:sp>
+      <p:sp>
+        <p:nvSpPr>
+          <p:cNvPr id="9" name="Text 6"/>
+          <p:cNvSpPr/>
+          <p:nvPr/>
+        </p:nvSpPr>
+        <p:spPr>
+          <a:xfrm>
+            <a:off x="457200" y="4800600"/>
+            <a:ext cx="6949440" cy="274320"/>
+          </a:xfrm>
+          <a:prstGeom prst="rect">
+            <a:avLst/>
+          </a:prstGeom>
+          <a:noFill/>
+          <a:ln/>
+        </p:spPr>
+        <p:txBody>
+          <a:bodyPr wrap="square" lIns="0" tIns="0" rIns="0" bIns="0" rtlCol="0" anchor="ctr"/>
+          <a:lstStyle/>
+          <a:p>
+            <a:pPr indent="0" marL="0">
+              <a:buNone/>
+            </a:pPr>
+            <a:r>
+              <a:rPr lang="en-US" sz="900" dirty="0">
+                <a:solidFill>
+                  <a:srgbClr val="64748B"/>
+                </a:solidFill>
+                <a:latin typeface="Calibri" pitchFamily="34" charset="0"/>
+                <a:ea typeface="Calibri" pitchFamily="34" charset="-122"/>
+                <a:cs typeface="Calibri" pitchFamily="34" charset="-120"/>
+              </a:rPr>
+              <a:t>Software Security · Week 11</a:t>
+            </a:r>
+            <a:endParaRPr lang="en-US" sz="900" dirty="0"/>
+          </a:p>
+        </p:txBody>
+      </p:sp>
+      <p:pic>
+        <p:nvPicPr>
+          <p:cNvPr id="10" name="Image 1" descr="/private/tmp/claude-501/-Users-pop7-Library-CloudStorage-OneDrive-MonsterConnectCo--Ltd-Lecture-KOSEN69---software-security/2a5e410a-41e6-41b1-93e2-54cd05af23b3/scratchpad/KOSEN69 - software-security/slides/pptx/assets/logo-small.png">    </p:cNvPr>
+          <p:cNvPicPr>
+            <a:picLocks noChangeAspect="1"/>
+          </p:cNvPicPr>
+          <p:nvPr/>
+        </p:nvPicPr>
+        <p:blipFill>
+          <a:blip r:embed="rId2"/>
+          <a:stretch>
+            <a:fillRect/>
+          </a:stretch>
+        </p:blipFill>
+        <p:spPr>
+          <a:xfrm>
+            <a:off x="7882128" y="4700016"/>
+            <a:ext cx="768096" cy="356616"/>
+          </a:xfrm>
+          <a:prstGeom prst="rect">
+            <a:avLst/>
+          </a:prstGeom>
+        </p:spPr>
+      </p:pic>
+    </p:spTree>
+  </p:cSld>
+  <p:clrMapOvr>
+    <a:masterClrMapping/>
+  </p:clrMapOvr>
+</p:sld>
+</file>
+
+<file path=ppt/slides/slide17.xml><?xml version="1.0" encoding="utf-8"?>
+<p:sld xmlns:a="http://schemas.openxmlformats.org/drawingml/2006/main" xmlns:r="http://schemas.openxmlformats.org/officeDocument/2006/relationships" xmlns:p="http://schemas.openxmlformats.org/presentationml/2006/main">
+  <p:cSld name="Slide 17">
+    <p:bg>
+      <p:bgPr>
+        <a:solidFill>
+          <a:srgbClr val="FFFFFF"/>
+        </a:solidFill>
+      </p:bgPr>
+    </p:bg>
+    <p:spTree>
+      <p:nvGrpSpPr>
+        <p:cNvPr id="1" name=""/>
+        <p:cNvGrpSpPr/>
+        <p:nvPr/>
+      </p:nvGrpSpPr>
+      <p:grpSpPr>
+        <a:xfrm>
+          <a:off x="0" y="0"/>
+          <a:ext cx="0" cy="0"/>
+          <a:chOff x="0" y="0"/>
+          <a:chExt cx="0" cy="0"/>
+        </a:xfrm>
+      </p:grpSpPr>
+      <p:sp>
+        <p:nvSpPr>
+          <p:cNvPr id="2" name="Shape 0"/>
+          <p:cNvSpPr/>
+          <p:nvPr/>
+        </p:nvSpPr>
+        <p:spPr>
+          <a:xfrm>
+            <a:off x="457200" y="384048"/>
+            <a:ext cx="530352" cy="530352"/>
+          </a:xfrm>
+          <a:prstGeom prst="ellipse">
+            <a:avLst/>
+          </a:prstGeom>
+          <a:solidFill>
+            <a:srgbClr val="E35205"/>
+          </a:solidFill>
+          <a:ln/>
+          <a:effectLst>
+            <a:outerShdw sx="100000" sy="100000" kx="0" ky="0" algn="bl" rotWithShape="0" blurRad="76200" dist="25400" dir="5400000">
+              <a:srgbClr val="000000">
+                <a:alpha val="12000"/>
+              </a:srgbClr>
+            </a:outerShdw>
+          </a:effectLst>
+        </p:spPr>
+      </p:sp>
+      <p:pic>
+        <p:nvPicPr>
+          <p:cNvPr id="3" name="Image 0" descr="preencoded.png">    </p:cNvPr>
+          <p:cNvPicPr>
+            <a:picLocks noChangeAspect="1"/>
+          </p:cNvPicPr>
+          <p:nvPr/>
+        </p:nvPicPr>
+        <p:blipFill>
+          <a:blip r:embed="rId1"/>
+          <a:stretch>
+            <a:fillRect/>
+          </a:stretch>
+        </p:blipFill>
+        <p:spPr>
+          <a:xfrm>
+            <a:off x="594360" y="521208"/>
+            <a:ext cx="256032" cy="256032"/>
+          </a:xfrm>
+          <a:prstGeom prst="rect">
+            <a:avLst/>
+          </a:prstGeom>
+        </p:spPr>
+      </p:pic>
+      <p:sp>
+        <p:nvSpPr>
+          <p:cNvPr id="4" name="Text 1"/>
+          <p:cNvSpPr/>
+          <p:nvPr/>
+        </p:nvSpPr>
+        <p:spPr>
+          <a:xfrm>
+            <a:off x="1143000" y="329184"/>
+            <a:ext cx="7498080" cy="603504"/>
+          </a:xfrm>
+          <a:prstGeom prst="rect">
+            <a:avLst/>
+          </a:prstGeom>
+          <a:noFill/>
+          <a:ln/>
+        </p:spPr>
+        <p:txBody>
+          <a:bodyPr wrap="square" lIns="0" tIns="0" rIns="0" bIns="0" rtlCol="0" anchor="ctr"/>
+          <a:lstStyle/>
+          <a:p>
+            <a:pPr indent="0" marL="0">
+              <a:buNone/>
+            </a:pPr>
+            <a:r>
+              <a:rPr lang="en-US" sz="2600" b="1" dirty="0">
+                <a:solidFill>
+                  <a:srgbClr val="1F2937"/>
+                </a:solidFill>
+                <a:latin typeface="Arial" pitchFamily="34" charset="0"/>
+                <a:ea typeface="Arial" pitchFamily="34" charset="-122"/>
+                <a:cs typeface="Arial" pitchFamily="34" charset="-120"/>
+              </a:rPr>
+              <a:t>Key takeaways</a:t>
+            </a:r>
+            <a:endParaRPr lang="en-US" sz="2600" dirty="0"/>
+          </a:p>
+        </p:txBody>
+      </p:sp>
+      <p:sp>
+        <p:nvSpPr>
+          <p:cNvPr id="5" name="Shape 2"/>
+          <p:cNvSpPr/>
+          <p:nvPr/>
+        </p:nvSpPr>
+        <p:spPr>
+          <a:xfrm>
+            <a:off x="457200" y="1325880"/>
+            <a:ext cx="8229600" cy="1207008"/>
+          </a:xfrm>
+          <a:prstGeom prst="roundRect">
+            <a:avLst>
+              <a:gd name="adj" fmla="val 6061"/>
+            </a:avLst>
+          </a:prstGeom>
+          <a:solidFill>
+            <a:srgbClr val="F1F5F9"/>
+          </a:solidFill>
+          <a:ln/>
+          <a:effectLst>
+            <a:outerShdw sx="100000" sy="100000" kx="0" ky="0" algn="bl" rotWithShape="0" blurRad="76200" dist="25400" dir="5400000">
+              <a:srgbClr val="000000">
+                <a:alpha val="12000"/>
+              </a:srgbClr>
+            </a:outerShdw>
+          </a:effectLst>
+        </p:spPr>
+      </p:sp>
+      <p:sp>
+        <p:nvSpPr>
+          <p:cNvPr id="6" name="Text 3"/>
+          <p:cNvSpPr/>
+          <p:nvPr/>
+        </p:nvSpPr>
+        <p:spPr>
+          <a:xfrm>
+            <a:off x="731520" y="1435608"/>
+            <a:ext cx="7680960" cy="987552"/>
+          </a:xfrm>
+          <a:prstGeom prst="rect">
+            <a:avLst/>
+          </a:prstGeom>
+          <a:noFill/>
+          <a:ln/>
+        </p:spPr>
+        <p:txBody>
+          <a:bodyPr wrap="square" lIns="0" tIns="0" rIns="0" bIns="0" rtlCol="0" anchor="t">
+            <a:normAutofit/>
+          </a:bodyPr>
+          <a:lstStyle/>
+          <a:p>
+            <a:pPr marL="342900" indent="-342900">
+              <a:spcAft>
+                <a:spcPts val="600"/>
+              </a:spcAft>
+              <a:buSzPct val="100000"/>
+              <a:buChar char="•"/>
+            </a:pPr>
+            <a:r>
+              <a:rPr lang="en-US" sz="1400" dirty="0">
+                <a:solidFill>
+                  <a:srgbClr val="1F2937"/>
+                </a:solidFill>
+                <a:latin typeface="Calibri" pitchFamily="34" charset="0"/>
+                <a:ea typeface="Calibri" pitchFamily="34" charset="-122"/>
+                <a:cs typeface="Calibri" pitchFamily="34" charset="-120"/>
+              </a:rPr>
+              <a:t>Fuzz to find, debug to understand, mitigate to slow attackers</a:t>
+            </a:r>
+            <a:endParaRPr lang="en-US" sz="1400" dirty="0"/>
+          </a:p>
+          <a:p>
+            <a:pPr marL="342900" indent="-342900">
+              <a:spcAft>
+                <a:spcPts val="600"/>
+              </a:spcAft>
+              <a:buSzPct val="100000"/>
+              <a:buChar char="•"/>
+            </a:pPr>
+            <a:r>
+              <a:rPr lang="en-US" sz="1400" dirty="0">
+                <a:solidFill>
+                  <a:srgbClr val="1F2937"/>
+                </a:solidFill>
+                <a:latin typeface="Calibri" pitchFamily="34" charset="0"/>
+                <a:ea typeface="Calibri" pitchFamily="34" charset="-122"/>
+                <a:cs typeface="Calibri" pitchFamily="34" charset="-120"/>
+              </a:rPr>
+              <a:t>Mitigations ≠ cure — memory-safe languages are the cure</a:t>
+            </a:r>
+            <a:endParaRPr lang="en-US" sz="1400" dirty="0"/>
+          </a:p>
+          <a:p>
+            <a:pPr marL="342900" indent="-342900">
+              <a:spcAft>
+                <a:spcPts val="600"/>
+              </a:spcAft>
+              <a:buSzPct val="100000"/>
+              <a:buChar char="•"/>
+            </a:pPr>
+            <a:r>
+              <a:rPr lang="en-US" sz="1400" dirty="0">
+                <a:solidFill>
+                  <a:srgbClr val="1F2937"/>
+                </a:solidFill>
+                <a:latin typeface="Calibri" pitchFamily="34" charset="0"/>
+                <a:ea typeface="Calibri" pitchFamily="34" charset="-122"/>
+                <a:cs typeface="Calibri" pitchFamily="34" charset="-120"/>
+              </a:rPr>
+              <a:t>This is where the industry is moving</a:t>
+            </a:r>
+            <a:endParaRPr lang="en-US" sz="1400" dirty="0"/>
+          </a:p>
+        </p:txBody>
+      </p:sp>
+      <p:sp>
+        <p:nvSpPr>
+          <p:cNvPr id="7" name="Text 4"/>
+          <p:cNvSpPr/>
+          <p:nvPr/>
+        </p:nvSpPr>
+        <p:spPr>
+          <a:xfrm>
+            <a:off x="457200" y="4800600"/>
+            <a:ext cx="6949440" cy="274320"/>
+          </a:xfrm>
+          <a:prstGeom prst="rect">
+            <a:avLst/>
+          </a:prstGeom>
+          <a:noFill/>
+          <a:ln/>
+        </p:spPr>
+        <p:txBody>
+          <a:bodyPr wrap="square" lIns="0" tIns="0" rIns="0" bIns="0" rtlCol="0" anchor="ctr"/>
+          <a:lstStyle/>
+          <a:p>
+            <a:pPr indent="0" marL="0">
+              <a:buNone/>
+            </a:pPr>
+            <a:r>
+              <a:rPr lang="en-US" sz="900" dirty="0">
+                <a:solidFill>
+                  <a:srgbClr val="64748B"/>
+                </a:solidFill>
+                <a:latin typeface="Calibri" pitchFamily="34" charset="0"/>
+                <a:ea typeface="Calibri" pitchFamily="34" charset="-122"/>
+                <a:cs typeface="Calibri" pitchFamily="34" charset="-120"/>
+              </a:rPr>
+              <a:t>Software Security · Week 11</a:t>
+            </a:r>
+            <a:endParaRPr lang="en-US" sz="900" dirty="0"/>
+          </a:p>
+        </p:txBody>
+      </p:sp>
+      <p:pic>
+        <p:nvPicPr>
+          <p:cNvPr id="8" name="Image 1" descr="/private/tmp/claude-501/-Users-pop7-Library-CloudStorage-OneDrive-MonsterConnectCo--Ltd-Lecture-KOSEN69---software-security/2a5e410a-41e6-41b1-93e2-54cd05af23b3/scratchpad/KOSEN69 - software-security/slides/pptx/assets/logo-small.png">    </p:cNvPr>
+          <p:cNvPicPr>
+            <a:picLocks noChangeAspect="1"/>
+          </p:cNvPicPr>
+          <p:nvPr/>
+        </p:nvPicPr>
+        <p:blipFill>
+          <a:blip r:embed="rId2"/>
+          <a:stretch>
+            <a:fillRect/>
+          </a:stretch>
+        </p:blipFill>
+        <p:spPr>
+          <a:xfrm>
+            <a:off x="7882128" y="4700016"/>
+            <a:ext cx="768096" cy="356616"/>
+          </a:xfrm>
+          <a:prstGeom prst="rect">
+            <a:avLst/>
+          </a:prstGeom>
+        </p:spPr>
+      </p:pic>
+    </p:spTree>
+  </p:cSld>
+  <p:clrMapOvr>
+    <a:masterClrMapping/>
+  </p:clrMapOvr>
+</p:sld>
+</file>
+
+<file path=ppt/slides/slide18.xml><?xml version="1.0" encoding="utf-8"?>
+<p:sld xmlns:a="http://schemas.openxmlformats.org/drawingml/2006/main" xmlns:r="http://schemas.openxmlformats.org/officeDocument/2006/relationships" xmlns:p="http://schemas.openxmlformats.org/presentationml/2006/main">
+  <p:cSld name="Slide 18">
+    <p:bg>
+      <p:bgPr>
+        <a:solidFill>
+          <a:srgbClr val="FFFFFF"/>
+        </a:solidFill>
+      </p:bgPr>
+    </p:bg>
+    <p:spTree>
+      <p:nvGrpSpPr>
+        <p:cNvPr id="1" name=""/>
+        <p:cNvGrpSpPr/>
+        <p:nvPr/>
+      </p:nvGrpSpPr>
+      <p:grpSpPr>
+        <a:xfrm>
+          <a:off x="0" y="0"/>
+          <a:ext cx="0" cy="0"/>
+          <a:chOff x="0" y="0"/>
+          <a:chExt cx="0" cy="0"/>
+        </a:xfrm>
+      </p:grpSpPr>
+      <p:sp>
+        <p:nvSpPr>
+          <p:cNvPr id="2" name="Text 0"/>
+          <p:cNvSpPr/>
+          <p:nvPr/>
+        </p:nvSpPr>
+        <p:spPr>
+          <a:xfrm>
+            <a:off x="640080" y="1737360"/>
+            <a:ext cx="7863840" cy="1097280"/>
+          </a:xfrm>
+          <a:prstGeom prst="rect">
+            <a:avLst/>
+          </a:prstGeom>
+          <a:noFill/>
+          <a:ln/>
+        </p:spPr>
+        <p:txBody>
+          <a:bodyPr wrap="square" lIns="0" tIns="0" rIns="0" bIns="0" rtlCol="0" anchor="ctr"/>
+          <a:lstStyle/>
+          <a:p>
+            <a:pPr indent="0" marL="0">
+              <a:buNone/>
+            </a:pPr>
+            <a:r>
+              <a:rPr lang="en-US" sz="4600" b="1" dirty="0">
+                <a:solidFill>
+                  <a:srgbClr val="1F2937"/>
+                </a:solidFill>
+                <a:latin typeface="Arial" pitchFamily="34" charset="0"/>
+                <a:ea typeface="Arial" pitchFamily="34" charset="-122"/>
+                <a:cs typeface="Arial" pitchFamily="34" charset="-120"/>
+              </a:rPr>
+              <a:t>Questions?</a:t>
+            </a:r>
+            <a:endParaRPr lang="en-US" sz="4600" dirty="0"/>
+          </a:p>
+        </p:txBody>
+      </p:sp>
+      <p:sp>
+        <p:nvSpPr>
+          <p:cNvPr id="3" name="Text 1"/>
+          <p:cNvSpPr/>
+          <p:nvPr/>
+        </p:nvSpPr>
+        <p:spPr>
+          <a:xfrm>
+            <a:off x="658368" y="2834640"/>
+            <a:ext cx="7863840" cy="731520"/>
+          </a:xfrm>
+          <a:prstGeom prst="rect">
+            <a:avLst/>
+          </a:prstGeom>
+          <a:noFill/>
+          <a:ln/>
+        </p:spPr>
+        <p:txBody>
+          <a:bodyPr wrap="square" lIns="0" tIns="0" rIns="0" bIns="0" rtlCol="0" anchor="ctr"/>
+          <a:lstStyle/>
+          <a:p>
+            <a:pPr indent="0" marL="0">
+              <a:buNone/>
+            </a:pPr>
+            <a:r>
+              <a:rPr lang="en-US" sz="1800" dirty="0">
+                <a:solidFill>
+                  <a:srgbClr val="E35205"/>
+                </a:solidFill>
+                <a:latin typeface="Calibri" pitchFamily="34" charset="0"/>
+                <a:ea typeface="Calibri" pitchFamily="34" charset="-122"/>
+                <a:cs typeface="Calibri" pitchFamily="34" charset="-120"/>
+              </a:rPr>
+              <a:t>Next week: Software supply-chain security</a:t>
+            </a:r>
+            <a:endParaRPr lang="en-US" sz="1800" dirty="0"/>
+          </a:p>
+        </p:txBody>
+      </p:sp>
+      <p:pic>
+        <p:nvPicPr>
+          <p:cNvPr id="4" name="Image 0" descr="/private/tmp/claude-501/-Users-pop7-Library-CloudStorage-OneDrive-MonsterConnectCo--Ltd-Lecture-KOSEN69---software-security/2a5e410a-41e6-41b1-93e2-54cd05af23b3/scratchpad/KOSEN69 - software-security/slides/pptx/assets/logo-small.png">    </p:cNvPr>
           <p:cNvPicPr>
             <a:picLocks noChangeAspect="1"/>
           </p:cNvPicPr>
@@ -4104,7 +5712,7 @@
       </p:sp>
       <p:pic>
         <p:nvPicPr>
-          <p:cNvPr id="8" name="Image 1" descr="/private/tmp/claude-501/-Users-pop7-Library-CloudStorage-OneDrive-MonsterConnectCo--Ltd-Lecture-KOSEN69---software-security/e6d6556f-17de-403d-a9a0-cf2f846149b4/scratchpad/tree/slides/pptx/assets/logo-small.png">    </p:cNvPr>
+          <p:cNvPr id="8" name="Image 1" descr="/private/tmp/claude-501/-Users-pop7-Library-CloudStorage-OneDrive-MonsterConnectCo--Ltd-Lecture-KOSEN69---software-security/2a5e410a-41e6-41b1-93e2-54cd05af23b3/scratchpad/KOSEN69 - software-security/slides/pptx/assets/logo-small.png">    </p:cNvPr>
           <p:cNvPicPr>
             <a:picLocks noChangeAspect="1"/>
           </p:cNvPicPr>
@@ -4405,7 +6013,7 @@
       </p:sp>
       <p:pic>
         <p:nvPicPr>
-          <p:cNvPr id="8" name="Image 1" descr="/private/tmp/claude-501/-Users-pop7-Library-CloudStorage-OneDrive-MonsterConnectCo--Ltd-Lecture-KOSEN69---software-security/e6d6556f-17de-403d-a9a0-cf2f846149b4/scratchpad/tree/slides/pptx/assets/logo-small.png">    </p:cNvPr>
+          <p:cNvPr id="8" name="Image 1" descr="/private/tmp/claude-501/-Users-pop7-Library-CloudStorage-OneDrive-MonsterConnectCo--Ltd-Lecture-KOSEN69---software-security/2a5e410a-41e6-41b1-93e2-54cd05af23b3/scratchpad/KOSEN69 - software-security/slides/pptx/assets/logo-small.png">    </p:cNvPr>
           <p:cNvPicPr>
             <a:picLocks noChangeAspect="1"/>
           </p:cNvPicPr>
@@ -4543,51 +6151,46 @@
                 <a:ea typeface="Arial" pitchFamily="34" charset="-122"/>
                 <a:cs typeface="Arial" pitchFamily="34" charset="-120"/>
               </a:rPr>
-              <a:t>The stack frame</a:t>
+              <a:t>Why it still matters — in one picture</a:t>
             </a:r>
             <a:endParaRPr lang="en-US" sz="2600" dirty="0"/>
           </a:p>
         </p:txBody>
       </p:sp>
-      <p:sp>
-        <p:nvSpPr>
-          <p:cNvPr id="5" name="Shape 2"/>
-          <p:cNvSpPr/>
-          <p:nvPr/>
-        </p:nvSpPr>
-        <p:spPr>
-          <a:xfrm>
-            <a:off x="457200" y="1325880"/>
-            <a:ext cx="8229600" cy="896112"/>
-          </a:xfrm>
-          <a:prstGeom prst="roundRect">
-            <a:avLst>
-              <a:gd name="adj" fmla="val 8163"/>
-            </a:avLst>
-          </a:prstGeom>
-          <a:solidFill>
-            <a:srgbClr val="F1F5F9"/>
-          </a:solidFill>
-          <a:ln/>
-          <a:effectLst>
-            <a:outerShdw sx="100000" sy="100000" kx="0" ky="0" algn="bl" rotWithShape="0" blurRad="76200" dist="25400" dir="5400000">
-              <a:srgbClr val="000000">
-                <a:alpha val="12000"/>
-              </a:srgbClr>
-            </a:outerShdw>
-          </a:effectLst>
-        </p:spPr>
-      </p:sp>
-      <p:sp>
-        <p:nvSpPr>
-          <p:cNvPr id="6" name="Text 3"/>
-          <p:cNvSpPr/>
-          <p:nvPr/>
-        </p:nvSpPr>
-        <p:spPr>
-          <a:xfrm>
-            <a:off x="731520" y="1435608"/>
-            <a:ext cx="7680960" cy="676656"/>
+      <p:pic>
+        <p:nvPicPr>
+          <p:cNvPr id="5" name="Image 1" descr="Why memory safety still matters: C/C++ runs the world's critical infrastructure (OS kernels, browsers, embedded, network stacks); memory bugs are about 70% of severe CVEs historically (Microsoft, Chrome and Android all agree); and it is now a national-policy issue (CISA Secure by Design, ONCD memory-safe roadmap, NSA guidance). Memory safety is not a legacy footnote — it is still the dominant source of serious vulnerabilities, which is why this week ends at &quot;rewrite it in a memory-safe language&quot;.">    </p:cNvPr>
+          <p:cNvPicPr>
+            <a:picLocks noChangeAspect="1"/>
+          </p:cNvPicPr>
+          <p:nvPr/>
+        </p:nvPicPr>
+        <p:blipFill>
+          <a:blip r:embed="rId2"/>
+          <a:stretch>
+            <a:fillRect/>
+          </a:stretch>
+        </p:blipFill>
+        <p:spPr>
+          <a:xfrm>
+            <a:off x="1296537" y="1097280"/>
+            <a:ext cx="6550925" cy="3566160"/>
+          </a:xfrm>
+          <a:prstGeom prst="rect">
+            <a:avLst/>
+          </a:prstGeom>
+        </p:spPr>
+      </p:pic>
+      <p:sp>
+        <p:nvSpPr>
+          <p:cNvPr id="6" name="Text 2"/>
+          <p:cNvSpPr/>
+          <p:nvPr/>
+        </p:nvSpPr>
+        <p:spPr>
+          <a:xfrm>
+            <a:off x="457200" y="4800600"/>
+            <a:ext cx="6949440" cy="274320"/>
           </a:xfrm>
           <a:prstGeom prst="rect">
             <a:avLst/>
@@ -4596,128 +6199,21 @@
           <a:ln/>
         </p:spPr>
         <p:txBody>
-          <a:bodyPr wrap="square" lIns="0" tIns="0" rIns="0" bIns="0" rtlCol="0" anchor="t">
-            <a:normAutofit/>
-          </a:bodyPr>
-          <a:lstStyle/>
-          <a:p>
-            <a:pPr marL="342900" indent="-342900">
-              <a:spcAft>
-                <a:spcPts val="600"/>
-              </a:spcAft>
-              <a:buSzPct val="100000"/>
-              <a:buChar char="•"/>
-            </a:pPr>
-            <a:r>
-              <a:rPr lang="en-US" sz="1400" dirty="0">
-                <a:solidFill>
-                  <a:srgbClr val="1F2937"/>
+          <a:bodyPr wrap="square" lIns="0" tIns="0" rIns="0" bIns="0" rtlCol="0" anchor="ctr"/>
+          <a:lstStyle/>
+          <a:p>
+            <a:pPr indent="0" marL="0">
+              <a:buNone/>
+            </a:pPr>
+            <a:r>
+              <a:rPr lang="en-US" sz="900" dirty="0">
+                <a:solidFill>
+                  <a:srgbClr val="64748B"/>
                 </a:solidFill>
                 <a:latin typeface="Calibri" pitchFamily="34" charset="0"/>
                 <a:ea typeface="Calibri" pitchFamily="34" charset="-122"/>
                 <a:cs typeface="Calibri" pitchFamily="34" charset="-120"/>
               </a:rPr>
-              <a:t>gets/strcpy/unchecked memcpy → overflow</a:t>
-            </a:r>
-            <a:endParaRPr lang="en-US" sz="1400" dirty="0"/>
-          </a:p>
-          <a:p>
-            <a:pPr marL="342900" indent="-342900">
-              <a:spcAft>
-                <a:spcPts val="600"/>
-              </a:spcAft>
-              <a:buSzPct val="100000"/>
-              <a:buChar char="•"/>
-            </a:pPr>
-            <a:r>
-              <a:rPr lang="en-US" sz="1400" dirty="0">
-                <a:solidFill>
-                  <a:srgbClr val="1F2937"/>
-                </a:solidFill>
-                <a:latin typeface="Calibri" pitchFamily="34" charset="0"/>
-                <a:ea typeface="Calibri" pitchFamily="34" charset="-122"/>
-                <a:cs typeface="Calibri" pitchFamily="34" charset="-120"/>
-              </a:rPr>
-              <a:t>Overwrite return address → redirect execution</a:t>
-            </a:r>
-            <a:endParaRPr lang="en-US" sz="1400" dirty="0"/>
-          </a:p>
-        </p:txBody>
-      </p:sp>
-      <p:sp>
-        <p:nvSpPr>
-          <p:cNvPr id="7" name="Text 4"/>
-          <p:cNvSpPr/>
-          <p:nvPr/>
-        </p:nvSpPr>
-        <p:spPr>
-          <a:xfrm>
-            <a:off x="548640" y="2386584"/>
-            <a:ext cx="8046720" cy="548640"/>
-          </a:xfrm>
-          <a:prstGeom prst="rect">
-            <a:avLst/>
-          </a:prstGeom>
-          <a:noFill/>
-          <a:ln/>
-        </p:spPr>
-        <p:txBody>
-          <a:bodyPr wrap="square" lIns="0" tIns="0" rIns="0" bIns="0" rtlCol="0" anchor="t">
-            <a:normAutofit/>
-          </a:bodyPr>
-          <a:lstStyle/>
-          <a:p>
-            <a:pPr indent="0" marL="0">
-              <a:buNone/>
-            </a:pPr>
-            <a:r>
-              <a:rPr lang="en-US" sz="1400" dirty="0">
-                <a:solidFill>
-                  <a:srgbClr val="1F2937"/>
-                </a:solidFill>
-                <a:latin typeface="Calibri" pitchFamily="34" charset="0"/>
-                <a:ea typeface="Calibri" pitchFamily="34" charset="-122"/>
-                <a:cs typeface="Calibri" pitchFamily="34" charset="-120"/>
-              </a:rPr>
-              <a:t>Try it live: /sim/stack-frame (interactive simulation, web only)</a:t>
-            </a:r>
-            <a:endParaRPr lang="en-US" sz="1400" dirty="0"/>
-          </a:p>
-        </p:txBody>
-      </p:sp>
-      <p:sp>
-        <p:nvSpPr>
-          <p:cNvPr id="8" name="Text 5"/>
-          <p:cNvSpPr/>
-          <p:nvPr/>
-        </p:nvSpPr>
-        <p:spPr>
-          <a:xfrm>
-            <a:off x="457200" y="4800600"/>
-            <a:ext cx="6949440" cy="274320"/>
-          </a:xfrm>
-          <a:prstGeom prst="rect">
-            <a:avLst/>
-          </a:prstGeom>
-          <a:noFill/>
-          <a:ln/>
-        </p:spPr>
-        <p:txBody>
-          <a:bodyPr wrap="square" lIns="0" tIns="0" rIns="0" bIns="0" rtlCol="0" anchor="ctr"/>
-          <a:lstStyle/>
-          <a:p>
-            <a:pPr indent="0" marL="0">
-              <a:buNone/>
-            </a:pPr>
-            <a:r>
-              <a:rPr lang="en-US" sz="900" dirty="0">
-                <a:solidFill>
-                  <a:srgbClr val="64748B"/>
-                </a:solidFill>
-                <a:latin typeface="Calibri" pitchFamily="34" charset="0"/>
-                <a:ea typeface="Calibri" pitchFamily="34" charset="-122"/>
-                <a:cs typeface="Calibri" pitchFamily="34" charset="-120"/>
-              </a:rPr>
               <a:t>Software Security · Week 11</a:t>
             </a:r>
             <a:endParaRPr lang="en-US" sz="900" dirty="0"/>
@@ -4726,14 +6222,14 @@
       </p:sp>
       <p:pic>
         <p:nvPicPr>
-          <p:cNvPr id="9" name="Image 1" descr="/private/tmp/claude-501/-Users-pop7-Library-CloudStorage-OneDrive-MonsterConnectCo--Ltd-Lecture-KOSEN69---software-security/e6d6556f-17de-403d-a9a0-cf2f846149b4/scratchpad/tree/slides/pptx/assets/logo-small.png">    </p:cNvPr>
+          <p:cNvPr id="7" name="Image 2" descr="/private/tmp/claude-501/-Users-pop7-Library-CloudStorage-OneDrive-MonsterConnectCo--Ltd-Lecture-KOSEN69---software-security/2a5e410a-41e6-41b1-93e2-54cd05af23b3/scratchpad/KOSEN69 - software-security/slides/pptx/assets/logo-small.png">    </p:cNvPr>
           <p:cNvPicPr>
             <a:picLocks noChangeAspect="1"/>
           </p:cNvPicPr>
           <p:nvPr/>
         </p:nvPicPr>
         <p:blipFill>
-          <a:blip r:embed="rId2"/>
+          <a:blip r:embed="rId3"/>
           <a:stretch>
             <a:fillRect/>
           </a:stretch>
@@ -4864,7 +6360,7 @@
                 <a:ea typeface="Arial" pitchFamily="34" charset="-122"/>
                 <a:cs typeface="Arial" pitchFamily="34" charset="-120"/>
               </a:rPr>
-              <a:t>Bug classes</a:t>
+              <a:t>The stack frame</a:t>
             </a:r>
             <a:endParaRPr lang="en-US" sz="2600" dirty="0"/>
           </a:p>
@@ -4879,11 +6375,11 @@
         <p:spPr>
           <a:xfrm>
             <a:off x="457200" y="1325880"/>
-            <a:ext cx="8229600" cy="1408176"/>
+            <a:ext cx="8229600" cy="896112"/>
           </a:xfrm>
           <a:prstGeom prst="roundRect">
             <a:avLst>
-              <a:gd name="adj" fmla="val 5195"/>
+              <a:gd name="adj" fmla="val 8163"/>
             </a:avLst>
           </a:prstGeom>
           <a:solidFill>
@@ -4908,7 +6404,7 @@
         <p:spPr>
           <a:xfrm>
             <a:off x="731520" y="1435608"/>
-            <a:ext cx="7680960" cy="1188720"/>
+            <a:ext cx="7680960" cy="676656"/>
           </a:xfrm>
           <a:prstGeom prst="rect">
             <a:avLst/>
@@ -4938,7 +6434,7 @@
                 <a:ea typeface="Calibri" pitchFamily="34" charset="-122"/>
                 <a:cs typeface="Calibri" pitchFamily="34" charset="-120"/>
               </a:rPr>
-              <a:t>CWE-121 stack overflow · CWE-787 OOB write</a:t>
+              <a:t>gets/strcpy/unchecked memcpy → overflow</a:t>
             </a:r>
             <a:endParaRPr lang="en-US" sz="1400" dirty="0"/>
           </a:p>
@@ -4959,17 +6455,37 @@
                 <a:ea typeface="Calibri" pitchFamily="34" charset="-122"/>
                 <a:cs typeface="Calibri" pitchFamily="34" charset="-120"/>
               </a:rPr>
-              <a:t>CWE-134 format string · CWE-242 dangerous function (gets())</a:t>
+              <a:t>Overwrite return address → redirect execution</a:t>
             </a:r>
             <a:endParaRPr lang="en-US" sz="1400" dirty="0"/>
           </a:p>
-          <a:p>
-            <a:pPr marL="342900" indent="-342900">
-              <a:spcAft>
-                <a:spcPts val="600"/>
-              </a:spcAft>
-              <a:buSzPct val="100000"/>
-              <a:buChar char="•"/>
+        </p:txBody>
+      </p:sp>
+      <p:sp>
+        <p:nvSpPr>
+          <p:cNvPr id="7" name="Text 4"/>
+          <p:cNvSpPr/>
+          <p:nvPr/>
+        </p:nvSpPr>
+        <p:spPr>
+          <a:xfrm>
+            <a:off x="548640" y="2386584"/>
+            <a:ext cx="8046720" cy="548640"/>
+          </a:xfrm>
+          <a:prstGeom prst="rect">
+            <a:avLst/>
+          </a:prstGeom>
+          <a:noFill/>
+          <a:ln/>
+        </p:spPr>
+        <p:txBody>
+          <a:bodyPr wrap="square" lIns="0" tIns="0" rIns="0" bIns="0" rtlCol="0" anchor="t">
+            <a:normAutofit/>
+          </a:bodyPr>
+          <a:lstStyle/>
+          <a:p>
+            <a:pPr indent="0" marL="0">
+              <a:buNone/>
             </a:pPr>
             <a:r>
               <a:rPr lang="en-US" sz="1400" dirty="0">
@@ -4980,7 +6496,7 @@
                 <a:ea typeface="Calibri" pitchFamily="34" charset="-122"/>
                 <a:cs typeface="Calibri" pitchFamily="34" charset="-120"/>
               </a:rPr>
-              <a:t>(this week's binary: no UAF, no off-by-one — those are real bug classes but not in this lab's code)</a:t>
+              <a:t>Try it live: /sim/stack-frame (interactive simulation, web only)</a:t>
             </a:r>
             <a:endParaRPr lang="en-US" sz="1400" dirty="0"/>
           </a:p>
@@ -4988,7 +6504,7 @@
       </p:sp>
       <p:sp>
         <p:nvSpPr>
-          <p:cNvPr id="7" name="Text 4"/>
+          <p:cNvPr id="8" name="Text 5"/>
           <p:cNvSpPr/>
           <p:nvPr/>
         </p:nvSpPr>
@@ -5027,7 +6543,7 @@
       </p:sp>
       <p:pic>
         <p:nvPicPr>
-          <p:cNvPr id="8" name="Image 1" descr="/private/tmp/claude-501/-Users-pop7-Library-CloudStorage-OneDrive-MonsterConnectCo--Ltd-Lecture-KOSEN69---software-security/e6d6556f-17de-403d-a9a0-cf2f846149b4/scratchpad/tree/slides/pptx/assets/logo-small.png">    </p:cNvPr>
+          <p:cNvPr id="9" name="Image 1" descr="/private/tmp/claude-501/-Users-pop7-Library-CloudStorage-OneDrive-MonsterConnectCo--Ltd-Lecture-KOSEN69---software-security/2a5e410a-41e6-41b1-93e2-54cd05af23b3/scratchpad/KOSEN69 - software-security/slides/pptx/assets/logo-small.png">    </p:cNvPr>
           <p:cNvPicPr>
             <a:picLocks noChangeAspect="1"/>
           </p:cNvPicPr>
@@ -5165,7 +6681,7 @@
                 <a:ea typeface="Arial" pitchFamily="34" charset="-122"/>
                 <a:cs typeface="Arial" pitchFamily="34" charset="-120"/>
               </a:rPr>
-              <a:t>Fuzzing — how bugs are found today</a:t>
+              <a:t>Bug classes</a:t>
             </a:r>
             <a:endParaRPr lang="en-US" sz="2600" dirty="0"/>
           </a:p>
@@ -5180,96 +6696,11 @@
         <p:spPr>
           <a:xfrm>
             <a:off x="457200" y="1325880"/>
-            <a:ext cx="8229600" cy="713232"/>
+            <a:ext cx="8229600" cy="1408176"/>
           </a:xfrm>
           <a:prstGeom prst="roundRect">
             <a:avLst>
-              <a:gd name="adj" fmla="val 7692"/>
-            </a:avLst>
-          </a:prstGeom>
-          <a:solidFill>
-            <a:srgbClr val="0A1020"/>
-          </a:solidFill>
-          <a:ln w="12700">
-            <a:solidFill>
-              <a:srgbClr val="E8EDF3"/>
-            </a:solidFill>
-            <a:prstDash val="solid"/>
-          </a:ln>
-        </p:spPr>
-      </p:sp>
-      <p:sp>
-        <p:nvSpPr>
-          <p:cNvPr id="6" name="Text 3"/>
-          <p:cNvSpPr/>
-          <p:nvPr/>
-        </p:nvSpPr>
-        <p:spPr>
-          <a:xfrm>
-            <a:off x="640080" y="1399032"/>
-            <a:ext cx="7863840" cy="566928"/>
-          </a:xfrm>
-          <a:prstGeom prst="rect">
-            <a:avLst/>
-          </a:prstGeom>
-          <a:noFill/>
-          <a:ln/>
-        </p:spPr>
-        <p:txBody>
-          <a:bodyPr wrap="square" lIns="0" tIns="0" rIns="0" bIns="0" rtlCol="0" anchor="t">
-            <a:normAutofit/>
-          </a:bodyPr>
-          <a:lstStyle/>
-          <a:p>
-            <a:pPr indent="0" marL="0">
-              <a:buNone/>
-            </a:pPr>
-            <a:r>
-              <a:rPr lang="en-US" sz="1150" dirty="0">
-                <a:solidFill>
-                  <a:srgbClr val="9FE7D6"/>
-                </a:solidFill>
-                <a:latin typeface="Courier New" pitchFamily="34" charset="0"/>
-                <a:ea typeface="Courier New" pitchFamily="34" charset="-122"/>
-                <a:cs typeface="Courier New" pitchFamily="34" charset="-120"/>
-              </a:rPr>
-              <a:t>clang -g -fsanitize=address,fuzzer fuzz_harness.c -o fuzz &amp;&amp; ./fuzz   # libFuzzer</a:t>
-            </a:r>
-            <a:endParaRPr lang="en-US" sz="1150" dirty="0"/>
-          </a:p>
-          <a:p>
-            <a:pPr indent="0" marL="0">
-              <a:buNone/>
-            </a:pPr>
-            <a:r>
-              <a:rPr lang="en-US" sz="1150" dirty="0">
-                <a:solidFill>
-                  <a:srgbClr val="9FE7D6"/>
-                </a:solidFill>
-                <a:latin typeface="Courier New" pitchFamily="34" charset="0"/>
-                <a:ea typeface="Courier New" pitchFamily="34" charset="-122"/>
-                <a:cs typeface="Courier New" pitchFamily="34" charset="-120"/>
-              </a:rPr>
-              <a:t>afl-fuzz -i seeds -o out -- ./vuln @@                                  # AFL++</a:t>
-            </a:r>
-            <a:endParaRPr lang="en-US" sz="1150" dirty="0"/>
-          </a:p>
-        </p:txBody>
-      </p:sp>
-      <p:sp>
-        <p:nvSpPr>
-          <p:cNvPr id="7" name="Shape 4"/>
-          <p:cNvSpPr/>
-          <p:nvPr/>
-        </p:nvSpPr>
-        <p:spPr>
-          <a:xfrm>
-            <a:off x="457200" y="2203704"/>
-            <a:ext cx="8229600" cy="896112"/>
-          </a:xfrm>
-          <a:prstGeom prst="roundRect">
-            <a:avLst>
-              <a:gd name="adj" fmla="val 8163"/>
+              <a:gd name="adj" fmla="val 5195"/>
             </a:avLst>
           </a:prstGeom>
           <a:solidFill>
@@ -5287,14 +6718,14 @@
       </p:sp>
       <p:sp>
         <p:nvSpPr>
-          <p:cNvPr id="8" name="Text 5"/>
-          <p:cNvSpPr/>
-          <p:nvPr/>
-        </p:nvSpPr>
-        <p:spPr>
-          <a:xfrm>
-            <a:off x="731520" y="2313432"/>
-            <a:ext cx="7680960" cy="676656"/>
+          <p:cNvPr id="6" name="Text 3"/>
+          <p:cNvSpPr/>
+          <p:nvPr/>
+        </p:nvSpPr>
+        <p:spPr>
+          <a:xfrm>
+            <a:off x="731520" y="1435608"/>
+            <a:ext cx="7680960" cy="1188720"/>
           </a:xfrm>
           <a:prstGeom prst="rect">
             <a:avLst/>
@@ -5324,7 +6755,7 @@
                 <a:ea typeface="Calibri" pitchFamily="34" charset="-122"/>
                 <a:cs typeface="Calibri" pitchFamily="34" charset="-120"/>
               </a:rPr>
-              <a:t>Coverage-guided mutation finds crashes fast</a:t>
+              <a:t>CWE-121 stack overflow · CWE-787 OOB write</a:t>
             </a:r>
             <a:endParaRPr lang="en-US" sz="1400" dirty="0"/>
           </a:p>
@@ -5345,45 +6776,66 @@
                 <a:ea typeface="Calibri" pitchFamily="34" charset="-122"/>
                 <a:cs typeface="Calibri" pitchFamily="34" charset="-120"/>
               </a:rPr>
-              <a:t>Pair with sanitizers (ASan) for root cause</a:t>
+              <a:t>CWE-134 format string · CWE-242 dangerous function (gets())</a:t>
             </a:r>
             <a:endParaRPr lang="en-US" sz="1400" dirty="0"/>
           </a:p>
-        </p:txBody>
-      </p:sp>
-      <p:sp>
-        <p:nvSpPr>
-          <p:cNvPr id="9" name="Text 6"/>
-          <p:cNvSpPr/>
-          <p:nvPr/>
-        </p:nvSpPr>
-        <p:spPr>
-          <a:xfrm>
-            <a:off x="457200" y="4800600"/>
-            <a:ext cx="6949440" cy="274320"/>
-          </a:xfrm>
-          <a:prstGeom prst="rect">
-            <a:avLst/>
-          </a:prstGeom>
-          <a:noFill/>
-          <a:ln/>
-        </p:spPr>
-        <p:txBody>
-          <a:bodyPr wrap="square" lIns="0" tIns="0" rIns="0" bIns="0" rtlCol="0" anchor="ctr"/>
-          <a:lstStyle/>
-          <a:p>
-            <a:pPr indent="0" marL="0">
-              <a:buNone/>
-            </a:pPr>
-            <a:r>
-              <a:rPr lang="en-US" sz="900" dirty="0">
-                <a:solidFill>
-                  <a:srgbClr val="64748B"/>
+          <a:p>
+            <a:pPr marL="342900" indent="-342900">
+              <a:spcAft>
+                <a:spcPts val="600"/>
+              </a:spcAft>
+              <a:buSzPct val="100000"/>
+              <a:buChar char="•"/>
+            </a:pPr>
+            <a:r>
+              <a:rPr lang="en-US" sz="1400" dirty="0">
+                <a:solidFill>
+                  <a:srgbClr val="1F2937"/>
                 </a:solidFill>
                 <a:latin typeface="Calibri" pitchFamily="34" charset="0"/>
                 <a:ea typeface="Calibri" pitchFamily="34" charset="-122"/>
                 <a:cs typeface="Calibri" pitchFamily="34" charset="-120"/>
               </a:rPr>
+              <a:t>(this week's binary: no UAF, no off-by-one — those are real bug classes but not in this lab's code)</a:t>
+            </a:r>
+            <a:endParaRPr lang="en-US" sz="1400" dirty="0"/>
+          </a:p>
+        </p:txBody>
+      </p:sp>
+      <p:sp>
+        <p:nvSpPr>
+          <p:cNvPr id="7" name="Text 4"/>
+          <p:cNvSpPr/>
+          <p:nvPr/>
+        </p:nvSpPr>
+        <p:spPr>
+          <a:xfrm>
+            <a:off x="457200" y="4800600"/>
+            <a:ext cx="6949440" cy="274320"/>
+          </a:xfrm>
+          <a:prstGeom prst="rect">
+            <a:avLst/>
+          </a:prstGeom>
+          <a:noFill/>
+          <a:ln/>
+        </p:spPr>
+        <p:txBody>
+          <a:bodyPr wrap="square" lIns="0" tIns="0" rIns="0" bIns="0" rtlCol="0" anchor="ctr"/>
+          <a:lstStyle/>
+          <a:p>
+            <a:pPr indent="0" marL="0">
+              <a:buNone/>
+            </a:pPr>
+            <a:r>
+              <a:rPr lang="en-US" sz="900" dirty="0">
+                <a:solidFill>
+                  <a:srgbClr val="64748B"/>
+                </a:solidFill>
+                <a:latin typeface="Calibri" pitchFamily="34" charset="0"/>
+                <a:ea typeface="Calibri" pitchFamily="34" charset="-122"/>
+                <a:cs typeface="Calibri" pitchFamily="34" charset="-120"/>
+              </a:rPr>
               <a:t>Software Security · Week 11</a:t>
             </a:r>
             <a:endParaRPr lang="en-US" sz="900" dirty="0"/>
@@ -5392,7 +6844,7 @@
       </p:sp>
       <p:pic>
         <p:nvPicPr>
-          <p:cNvPr id="10" name="Image 1" descr="/private/tmp/claude-501/-Users-pop7-Library-CloudStorage-OneDrive-MonsterConnectCo--Ltd-Lecture-KOSEN69---software-security/e6d6556f-17de-403d-a9a0-cf2f846149b4/scratchpad/tree/slides/pptx/assets/logo-small.png">    </p:cNvPr>
+          <p:cNvPr id="8" name="Image 1" descr="/private/tmp/claude-501/-Users-pop7-Library-CloudStorage-OneDrive-MonsterConnectCo--Ltd-Lecture-KOSEN69---software-security/2a5e410a-41e6-41b1-93e2-54cd05af23b3/scratchpad/KOSEN69 - software-security/slides/pptx/assets/logo-small.png">    </p:cNvPr>
           <p:cNvPicPr>
             <a:picLocks noChangeAspect="1"/>
           </p:cNvPicPr>
@@ -5530,42 +6982,46 @@
                 <a:ea typeface="Arial" pitchFamily="34" charset="-122"/>
                 <a:cs typeface="Arial" pitchFamily="34" charset="-120"/>
               </a:rPr>
-              <a:t>Exploiting a stack overflow</a:t>
+              <a:t>The four bug classes, side by side</a:t>
             </a:r>
             <a:endParaRPr lang="en-US" sz="2600" dirty="0"/>
           </a:p>
         </p:txBody>
       </p:sp>
-      <p:sp>
-        <p:nvSpPr>
-          <p:cNvPr id="5" name="Shape 2"/>
-          <p:cNvSpPr/>
-          <p:nvPr/>
-        </p:nvSpPr>
-        <p:spPr>
-          <a:xfrm>
-            <a:off x="502920" y="1325880"/>
-            <a:ext cx="384048" cy="384048"/>
-          </a:xfrm>
-          <a:prstGeom prst="ellipse">
-            <a:avLst/>
-          </a:prstGeom>
-          <a:solidFill>
-            <a:srgbClr val="E35205"/>
-          </a:solidFill>
-          <a:ln/>
-        </p:spPr>
-      </p:sp>
-      <p:sp>
-        <p:nvSpPr>
-          <p:cNvPr id="6" name="Text 3"/>
-          <p:cNvSpPr/>
-          <p:nvPr/>
-        </p:nvSpPr>
-        <p:spPr>
-          <a:xfrm>
-            <a:off x="502920" y="1325880"/>
-            <a:ext cx="384048" cy="384048"/>
+      <p:pic>
+        <p:nvPicPr>
+          <p:cNvPr id="5" name="Image 1" descr="The four memory-safety weakness classes present in this week's vuln.c, as a classification (not an exploitation guide): CWE-121 stack-based buffer overflow (writing past a fixed char buf[] overruns adjacent stack memory), CWE-787 out-of-bounds write (the umbrella class, of which CWE-121 is the stack case), CWE-134 use of an externally-controlled format string (printf(user) instead of printf(&quot;%s&quot;, user) lets input read or corrupt memory), and CWE-242 use of an inherently dangerous function (gets(), which cannot be used safely and was removed from C11). Footnote: this binary has no use-after-free and no off-by-one — real classes, just not in this code.">    </p:cNvPr>
+          <p:cNvPicPr>
+            <a:picLocks noChangeAspect="1"/>
+          </p:cNvPicPr>
+          <p:nvPr/>
+        </p:nvPicPr>
+        <p:blipFill>
+          <a:blip r:embed="rId2"/>
+          <a:stretch>
+            <a:fillRect/>
+          </a:stretch>
+        </p:blipFill>
+        <p:spPr>
+          <a:xfrm>
+            <a:off x="1875471" y="1097280"/>
+            <a:ext cx="5393059" cy="3566160"/>
+          </a:xfrm>
+          <a:prstGeom prst="rect">
+            <a:avLst/>
+          </a:prstGeom>
+        </p:spPr>
+      </p:pic>
+      <p:sp>
+        <p:nvSpPr>
+          <p:cNvPr id="6" name="Text 2"/>
+          <p:cNvSpPr/>
+          <p:nvPr/>
+        </p:nvSpPr>
+        <p:spPr>
+          <a:xfrm>
+            <a:off x="457200" y="4800600"/>
+            <a:ext cx="6949440" cy="274320"/>
           </a:xfrm>
           <a:prstGeom prst="rect">
             <a:avLst/>
@@ -5575,300 +7031,20 @@
         </p:spPr>
         <p:txBody>
           <a:bodyPr wrap="square" lIns="0" tIns="0" rIns="0" bIns="0" rtlCol="0" anchor="ctr"/>
-          <a:lstStyle/>
-          <a:p>
-            <a:pPr algn="ctr" indent="0" marL="0">
-              <a:buNone/>
-            </a:pPr>
-            <a:r>
-              <a:rPr lang="en-US" sz="1500" b="1" dirty="0">
-                <a:solidFill>
-                  <a:srgbClr val="0E1726"/>
-                </a:solidFill>
-                <a:latin typeface="Arial" pitchFamily="34" charset="0"/>
-                <a:ea typeface="Arial" pitchFamily="34" charset="-122"/>
-                <a:cs typeface="Arial" pitchFamily="34" charset="-120"/>
-              </a:rPr>
-              <a:t>1</a:t>
-            </a:r>
-            <a:endParaRPr lang="en-US" sz="1500" dirty="0"/>
-          </a:p>
-        </p:txBody>
-      </p:sp>
-      <p:sp>
-        <p:nvSpPr>
-          <p:cNvPr id="7" name="Text 4"/>
-          <p:cNvSpPr/>
-          <p:nvPr/>
-        </p:nvSpPr>
-        <p:spPr>
-          <a:xfrm>
-            <a:off x="1051560" y="1325880"/>
-            <a:ext cx="7589520" cy="914400"/>
-          </a:xfrm>
-          <a:prstGeom prst="rect">
-            <a:avLst/>
-          </a:prstGeom>
-          <a:noFill/>
-          <a:ln/>
-        </p:spPr>
-        <p:txBody>
-          <a:bodyPr wrap="square" lIns="0" tIns="0" rIns="0" bIns="0" rtlCol="0" anchor="ctr">
-            <a:normAutofit/>
-          </a:bodyPr>
           <a:lstStyle/>
           <a:p>
             <a:pPr indent="0" marL="0">
               <a:buNone/>
             </a:pPr>
             <a:r>
-              <a:rPr lang="en-US" sz="1350" dirty="0">
-                <a:solidFill>
-                  <a:srgbClr val="1F2937"/>
+              <a:rPr lang="en-US" sz="900" dirty="0">
+                <a:solidFill>
+                  <a:srgbClr val="64748B"/>
                 </a:solidFill>
                 <a:latin typeface="Calibri" pitchFamily="34" charset="0"/>
                 <a:ea typeface="Calibri" pitchFamily="34" charset="-122"/>
                 <a:cs typeface="Calibri" pitchFamily="34" charset="-120"/>
               </a:rPr>
-              <a:t>Find offset to return address with a cyclic pattern — verify it, don't assume it: this build's offset is 72 bytes, but enabling the stack canary alone moves it to 80 (the canary word sits between buffer and return address)</a:t>
-            </a:r>
-            <a:endParaRPr lang="en-US" sz="1350" dirty="0"/>
-          </a:p>
-        </p:txBody>
-      </p:sp>
-      <p:sp>
-        <p:nvSpPr>
-          <p:cNvPr id="8" name="Shape 5"/>
-          <p:cNvSpPr/>
-          <p:nvPr/>
-        </p:nvSpPr>
-        <p:spPr>
-          <a:xfrm>
-            <a:off x="502920" y="2313432"/>
-            <a:ext cx="384048" cy="384048"/>
-          </a:xfrm>
-          <a:prstGeom prst="ellipse">
-            <a:avLst/>
-          </a:prstGeom>
-          <a:solidFill>
-            <a:srgbClr val="E35205"/>
-          </a:solidFill>
-          <a:ln/>
-        </p:spPr>
-      </p:sp>
-      <p:sp>
-        <p:nvSpPr>
-          <p:cNvPr id="9" name="Text 6"/>
-          <p:cNvSpPr/>
-          <p:nvPr/>
-        </p:nvSpPr>
-        <p:spPr>
-          <a:xfrm>
-            <a:off x="502920" y="2313432"/>
-            <a:ext cx="384048" cy="384048"/>
-          </a:xfrm>
-          <a:prstGeom prst="rect">
-            <a:avLst/>
-          </a:prstGeom>
-          <a:noFill/>
-          <a:ln/>
-        </p:spPr>
-        <p:txBody>
-          <a:bodyPr wrap="square" lIns="0" tIns="0" rIns="0" bIns="0" rtlCol="0" anchor="ctr"/>
-          <a:lstStyle/>
-          <a:p>
-            <a:pPr algn="ctr" indent="0" marL="0">
-              <a:buNone/>
-            </a:pPr>
-            <a:r>
-              <a:rPr lang="en-US" sz="1500" b="1" dirty="0">
-                <a:solidFill>
-                  <a:srgbClr val="0E1726"/>
-                </a:solidFill>
-                <a:latin typeface="Arial" pitchFamily="34" charset="0"/>
-                <a:ea typeface="Arial" pitchFamily="34" charset="-122"/>
-                <a:cs typeface="Arial" pitchFamily="34" charset="-120"/>
-              </a:rPr>
-              <a:t>2</a:t>
-            </a:r>
-            <a:endParaRPr lang="en-US" sz="1500" dirty="0"/>
-          </a:p>
-        </p:txBody>
-      </p:sp>
-      <p:sp>
-        <p:nvSpPr>
-          <p:cNvPr id="10" name="Text 7"/>
-          <p:cNvSpPr/>
-          <p:nvPr/>
-        </p:nvSpPr>
-        <p:spPr>
-          <a:xfrm>
-            <a:off x="1051560" y="2313432"/>
-            <a:ext cx="7589520" cy="402336"/>
-          </a:xfrm>
-          <a:prstGeom prst="rect">
-            <a:avLst/>
-          </a:prstGeom>
-          <a:noFill/>
-          <a:ln/>
-        </p:spPr>
-        <p:txBody>
-          <a:bodyPr wrap="square" lIns="0" tIns="0" rIns="0" bIns="0" rtlCol="0" anchor="ctr">
-            <a:normAutofit/>
-          </a:bodyPr>
-          <a:lstStyle/>
-          <a:p>
-            <a:pPr indent="0" marL="0">
-              <a:buNone/>
-            </a:pPr>
-            <a:r>
-              <a:rPr lang="en-US" sz="1350" dirty="0">
-                <a:solidFill>
-                  <a:srgbClr val="1F2937"/>
-                </a:solidFill>
-                <a:latin typeface="Calibri" pitchFamily="34" charset="0"/>
-                <a:ea typeface="Calibri" pitchFamily="34" charset="-122"/>
-                <a:cs typeface="Calibri" pitchFamily="34" charset="-120"/>
-              </a:rPr>
-              <a:t>Overwrite RA → jump to win()</a:t>
-            </a:r>
-            <a:endParaRPr lang="en-US" sz="1350" dirty="0"/>
-          </a:p>
-        </p:txBody>
-      </p:sp>
-      <p:sp>
-        <p:nvSpPr>
-          <p:cNvPr id="11" name="Shape 8"/>
-          <p:cNvSpPr/>
-          <p:nvPr/>
-        </p:nvSpPr>
-        <p:spPr>
-          <a:xfrm>
-            <a:off x="502920" y="2788920"/>
-            <a:ext cx="384048" cy="384048"/>
-          </a:xfrm>
-          <a:prstGeom prst="ellipse">
-            <a:avLst/>
-          </a:prstGeom>
-          <a:solidFill>
-            <a:srgbClr val="E35205"/>
-          </a:solidFill>
-          <a:ln/>
-        </p:spPr>
-      </p:sp>
-      <p:sp>
-        <p:nvSpPr>
-          <p:cNvPr id="12" name="Text 9"/>
-          <p:cNvSpPr/>
-          <p:nvPr/>
-        </p:nvSpPr>
-        <p:spPr>
-          <a:xfrm>
-            <a:off x="502920" y="2788920"/>
-            <a:ext cx="384048" cy="384048"/>
-          </a:xfrm>
-          <a:prstGeom prst="rect">
-            <a:avLst/>
-          </a:prstGeom>
-          <a:noFill/>
-          <a:ln/>
-        </p:spPr>
-        <p:txBody>
-          <a:bodyPr wrap="square" lIns="0" tIns="0" rIns="0" bIns="0" rtlCol="0" anchor="ctr"/>
-          <a:lstStyle/>
-          <a:p>
-            <a:pPr algn="ctr" indent="0" marL="0">
-              <a:buNone/>
-            </a:pPr>
-            <a:r>
-              <a:rPr lang="en-US" sz="1500" b="1" dirty="0">
-                <a:solidFill>
-                  <a:srgbClr val="0E1726"/>
-                </a:solidFill>
-                <a:latin typeface="Arial" pitchFamily="34" charset="0"/>
-                <a:ea typeface="Arial" pitchFamily="34" charset="-122"/>
-                <a:cs typeface="Arial" pitchFamily="34" charset="-120"/>
-              </a:rPr>
-              <a:t>3</a:t>
-            </a:r>
-            <a:endParaRPr lang="en-US" sz="1500" dirty="0"/>
-          </a:p>
-        </p:txBody>
-      </p:sp>
-      <p:sp>
-        <p:nvSpPr>
-          <p:cNvPr id="13" name="Text 10"/>
-          <p:cNvSpPr/>
-          <p:nvPr/>
-        </p:nvSpPr>
-        <p:spPr>
-          <a:xfrm>
-            <a:off x="1051560" y="2788920"/>
-            <a:ext cx="7589520" cy="402336"/>
-          </a:xfrm>
-          <a:prstGeom prst="rect">
-            <a:avLst/>
-          </a:prstGeom>
-          <a:noFill/>
-          <a:ln/>
-        </p:spPr>
-        <p:txBody>
-          <a:bodyPr wrap="square" lIns="0" tIns="0" rIns="0" bIns="0" rtlCol="0" anchor="ctr">
-            <a:normAutofit/>
-          </a:bodyPr>
-          <a:lstStyle/>
-          <a:p>
-            <a:pPr indent="0" marL="0">
-              <a:buNone/>
-            </a:pPr>
-            <a:r>
-              <a:rPr lang="en-US" sz="1350" dirty="0">
-                <a:solidFill>
-                  <a:srgbClr val="1F2937"/>
-                </a:solidFill>
-                <a:latin typeface="Calibri" pitchFamily="34" charset="0"/>
-                <a:ea typeface="Calibri" pitchFamily="34" charset="-122"/>
-                <a:cs typeface="Calibri" pitchFamily="34" charset="-120"/>
-              </a:rPr>
-              <a:t>Format string: %x%x%x leak, %n write</a:t>
-            </a:r>
-            <a:endParaRPr lang="en-US" sz="1350" dirty="0"/>
-          </a:p>
-        </p:txBody>
-      </p:sp>
-      <p:sp>
-        <p:nvSpPr>
-          <p:cNvPr id="14" name="Text 11"/>
-          <p:cNvSpPr/>
-          <p:nvPr/>
-        </p:nvSpPr>
-        <p:spPr>
-          <a:xfrm>
-            <a:off x="457200" y="4800600"/>
-            <a:ext cx="6949440" cy="274320"/>
-          </a:xfrm>
-          <a:prstGeom prst="rect">
-            <a:avLst/>
-          </a:prstGeom>
-          <a:noFill/>
-          <a:ln/>
-        </p:spPr>
-        <p:txBody>
-          <a:bodyPr wrap="square" lIns="0" tIns="0" rIns="0" bIns="0" rtlCol="0" anchor="ctr"/>
-          <a:lstStyle/>
-          <a:p>
-            <a:pPr indent="0" marL="0">
-              <a:buNone/>
-            </a:pPr>
-            <a:r>
-              <a:rPr lang="en-US" sz="900" dirty="0">
-                <a:solidFill>
-                  <a:srgbClr val="64748B"/>
-                </a:solidFill>
-                <a:latin typeface="Calibri" pitchFamily="34" charset="0"/>
-                <a:ea typeface="Calibri" pitchFamily="34" charset="-122"/>
-                <a:cs typeface="Calibri" pitchFamily="34" charset="-120"/>
-              </a:rPr>
               <a:t>Software Security · Week 11</a:t>
             </a:r>
             <a:endParaRPr lang="en-US" sz="900" dirty="0"/>
@@ -5877,14 +7053,14 @@
       </p:sp>
       <p:pic>
         <p:nvPicPr>
-          <p:cNvPr id="15" name="Image 1" descr="/private/tmp/claude-501/-Users-pop7-Library-CloudStorage-OneDrive-MonsterConnectCo--Ltd-Lecture-KOSEN69---software-security/e6d6556f-17de-403d-a9a0-cf2f846149b4/scratchpad/tree/slides/pptx/assets/logo-small.png">    </p:cNvPr>
+          <p:cNvPr id="7" name="Image 2" descr="/private/tmp/claude-501/-Users-pop7-Library-CloudStorage-OneDrive-MonsterConnectCo--Ltd-Lecture-KOSEN69---software-security/2a5e410a-41e6-41b1-93e2-54cd05af23b3/scratchpad/KOSEN69 - software-security/slides/pptx/assets/logo-small.png">    </p:cNvPr>
           <p:cNvPicPr>
             <a:picLocks noChangeAspect="1"/>
           </p:cNvPicPr>
           <p:nvPr/>
         </p:nvPicPr>
         <p:blipFill>
-          <a:blip r:embed="rId2"/>
+          <a:blip r:embed="rId3"/>
           <a:stretch>
             <a:fillRect/>
           </a:stretch>
@@ -6015,7 +7191,7 @@
                 <a:ea typeface="Arial" pitchFamily="34" charset="-122"/>
                 <a:cs typeface="Arial" pitchFamily="34" charset="-120"/>
               </a:rPr>
-              <a:t>Mitigations raise the bar</a:t>
+              <a:t>Fuzzing — how bugs are found today</a:t>
             </a:r>
             <a:endParaRPr lang="en-US" sz="2600" dirty="0"/>
           </a:p>
@@ -6030,11 +7206,96 @@
         <p:spPr>
           <a:xfrm>
             <a:off x="457200" y="1325880"/>
-            <a:ext cx="8229600" cy="2834640"/>
+            <a:ext cx="8229600" cy="713232"/>
           </a:xfrm>
           <a:prstGeom prst="roundRect">
             <a:avLst>
-              <a:gd name="adj" fmla="val 2581"/>
+              <a:gd name="adj" fmla="val 7692"/>
+            </a:avLst>
+          </a:prstGeom>
+          <a:solidFill>
+            <a:srgbClr val="0A1020"/>
+          </a:solidFill>
+          <a:ln w="12700">
+            <a:solidFill>
+              <a:srgbClr val="E8EDF3"/>
+            </a:solidFill>
+            <a:prstDash val="solid"/>
+          </a:ln>
+        </p:spPr>
+      </p:sp>
+      <p:sp>
+        <p:nvSpPr>
+          <p:cNvPr id="6" name="Text 3"/>
+          <p:cNvSpPr/>
+          <p:nvPr/>
+        </p:nvSpPr>
+        <p:spPr>
+          <a:xfrm>
+            <a:off x="640080" y="1399032"/>
+            <a:ext cx="7863840" cy="566928"/>
+          </a:xfrm>
+          <a:prstGeom prst="rect">
+            <a:avLst/>
+          </a:prstGeom>
+          <a:noFill/>
+          <a:ln/>
+        </p:spPr>
+        <p:txBody>
+          <a:bodyPr wrap="square" lIns="0" tIns="0" rIns="0" bIns="0" rtlCol="0" anchor="t">
+            <a:normAutofit/>
+          </a:bodyPr>
+          <a:lstStyle/>
+          <a:p>
+            <a:pPr indent="0" marL="0">
+              <a:buNone/>
+            </a:pPr>
+            <a:r>
+              <a:rPr lang="en-US" sz="1150" dirty="0">
+                <a:solidFill>
+                  <a:srgbClr val="9FE7D6"/>
+                </a:solidFill>
+                <a:latin typeface="Courier New" pitchFamily="34" charset="0"/>
+                <a:ea typeface="Courier New" pitchFamily="34" charset="-122"/>
+                <a:cs typeface="Courier New" pitchFamily="34" charset="-120"/>
+              </a:rPr>
+              <a:t>clang -g -fsanitize=address,fuzzer fuzz_harness.c -o fuzz &amp;&amp; ./fuzz   # libFuzzer</a:t>
+            </a:r>
+            <a:endParaRPr lang="en-US" sz="1150" dirty="0"/>
+          </a:p>
+          <a:p>
+            <a:pPr indent="0" marL="0">
+              <a:buNone/>
+            </a:pPr>
+            <a:r>
+              <a:rPr lang="en-US" sz="1150" dirty="0">
+                <a:solidFill>
+                  <a:srgbClr val="9FE7D6"/>
+                </a:solidFill>
+                <a:latin typeface="Courier New" pitchFamily="34" charset="0"/>
+                <a:ea typeface="Courier New" pitchFamily="34" charset="-122"/>
+                <a:cs typeface="Courier New" pitchFamily="34" charset="-120"/>
+              </a:rPr>
+              <a:t>afl-fuzz -i seeds -o out -- ./vuln @@                                  # AFL++</a:t>
+            </a:r>
+            <a:endParaRPr lang="en-US" sz="1150" dirty="0"/>
+          </a:p>
+        </p:txBody>
+      </p:sp>
+      <p:sp>
+        <p:nvSpPr>
+          <p:cNvPr id="7" name="Shape 4"/>
+          <p:cNvSpPr/>
+          <p:nvPr/>
+        </p:nvSpPr>
+        <p:spPr>
+          <a:xfrm>
+            <a:off x="457200" y="2203704"/>
+            <a:ext cx="8229600" cy="896112"/>
+          </a:xfrm>
+          <a:prstGeom prst="roundRect">
+            <a:avLst>
+              <a:gd name="adj" fmla="val 8163"/>
             </a:avLst>
           </a:prstGeom>
           <a:solidFill>
@@ -6052,14 +7313,14 @@
       </p:sp>
       <p:sp>
         <p:nvSpPr>
-          <p:cNvPr id="6" name="Text 3"/>
-          <p:cNvSpPr/>
-          <p:nvPr/>
-        </p:nvSpPr>
-        <p:spPr>
-          <a:xfrm>
-            <a:off x="731520" y="1435608"/>
-            <a:ext cx="7680960" cy="2615184"/>
+          <p:cNvPr id="8" name="Text 5"/>
+          <p:cNvSpPr/>
+          <p:nvPr/>
+        </p:nvSpPr>
+        <p:spPr>
+          <a:xfrm>
+            <a:off x="731520" y="2313432"/>
+            <a:ext cx="7680960" cy="676656"/>
           </a:xfrm>
           <a:prstGeom prst="rect">
             <a:avLst/>
@@ -6089,7 +7350,7 @@
                 <a:ea typeface="Calibri" pitchFamily="34" charset="-122"/>
                 <a:cs typeface="Calibri" pitchFamily="34" charset="-120"/>
               </a:rPr>
-              <a:t>FORTIFY_SOURCE — checks the copy itself, at call time (__strcpy_chk)</a:t>
+              <a:t>Coverage-guided mutation finds crashes fast</a:t>
             </a:r>
             <a:endParaRPr lang="en-US" sz="1400" dirty="0"/>
           </a:p>
@@ -6110,108 +7371,45 @@
                 <a:ea typeface="Calibri" pitchFamily="34" charset="-122"/>
                 <a:cs typeface="Calibri" pitchFamily="34" charset="-120"/>
               </a:rPr>
-              <a:t>Stack canaries — detect overwrite at function return, after the copy already happened</a:t>
+              <a:t>Pair with sanitizers (ASan) for root cause</a:t>
             </a:r>
             <a:endParaRPr lang="en-US" sz="1400" dirty="0"/>
           </a:p>
-          <a:p>
-            <a:pPr marL="342900" indent="-342900">
-              <a:spcAft>
-                <a:spcPts val="600"/>
-              </a:spcAft>
-              <a:buSzPct val="100000"/>
-              <a:buChar char="•"/>
-            </a:pPr>
-            <a:r>
-              <a:rPr lang="en-US" sz="1400" dirty="0">
-                <a:solidFill>
-                  <a:srgbClr val="1F2937"/>
+        </p:txBody>
+      </p:sp>
+      <p:sp>
+        <p:nvSpPr>
+          <p:cNvPr id="9" name="Text 6"/>
+          <p:cNvSpPr/>
+          <p:nvPr/>
+        </p:nvSpPr>
+        <p:spPr>
+          <a:xfrm>
+            <a:off x="457200" y="4800600"/>
+            <a:ext cx="6949440" cy="274320"/>
+          </a:xfrm>
+          <a:prstGeom prst="rect">
+            <a:avLst/>
+          </a:prstGeom>
+          <a:noFill/>
+          <a:ln/>
+        </p:spPr>
+        <p:txBody>
+          <a:bodyPr wrap="square" lIns="0" tIns="0" rIns="0" bIns="0" rtlCol="0" anchor="ctr"/>
+          <a:lstStyle/>
+          <a:p>
+            <a:pPr indent="0" marL="0">
+              <a:buNone/>
+            </a:pPr>
+            <a:r>
+              <a:rPr lang="en-US" sz="900" dirty="0">
+                <a:solidFill>
+                  <a:srgbClr val="64748B"/>
                 </a:solidFill>
                 <a:latin typeface="Calibri" pitchFamily="34" charset="0"/>
                 <a:ea typeface="Calibri" pitchFamily="34" charset="-122"/>
                 <a:cs typeface="Calibri" pitchFamily="34" charset="-120"/>
               </a:rPr>
-              <a:t>ASLR / PIE — randomize addresses</a:t>
-            </a:r>
-            <a:endParaRPr lang="en-US" sz="1400" dirty="0"/>
-          </a:p>
-          <a:p>
-            <a:pPr marL="342900" indent="-342900">
-              <a:spcAft>
-                <a:spcPts val="600"/>
-              </a:spcAft>
-              <a:buSzPct val="100000"/>
-              <a:buChar char="•"/>
-            </a:pPr>
-            <a:r>
-              <a:rPr lang="en-US" sz="1400" dirty="0">
-                <a:solidFill>
-                  <a:srgbClr val="1F2937"/>
-                </a:solidFill>
-                <a:latin typeface="Calibri" pitchFamily="34" charset="0"/>
-                <a:ea typeface="Calibri" pitchFamily="34" charset="-122"/>
-                <a:cs typeface="Calibri" pitchFamily="34" charset="-120"/>
-              </a:rPr>
-              <a:t>NX/DEP — blocks executing shellcode planted on the stack — irrelevant to this exploit, which returns into existing code (win()), never injects shellcode</a:t>
-            </a:r>
-            <a:endParaRPr lang="en-US" sz="1400" dirty="0"/>
-          </a:p>
-          <a:p>
-            <a:pPr marL="342900" indent="-342900">
-              <a:spcAft>
-                <a:spcPts val="600"/>
-              </a:spcAft>
-              <a:buSzPct val="100000"/>
-              <a:buChar char="•"/>
-            </a:pPr>
-            <a:r>
-              <a:rPr lang="en-US" sz="1400" dirty="0">
-                <a:solidFill>
-                  <a:srgbClr val="1F2937"/>
-                </a:solidFill>
-                <a:latin typeface="Calibri" pitchFamily="34" charset="0"/>
-                <a:ea typeface="Calibri" pitchFamily="34" charset="-122"/>
-                <a:cs typeface="Calibri" pitchFamily="34" charset="-120"/>
-              </a:rPr>
-              <a:t>On this lab's hardened build, FORTIFY fires first — *** buffer overflow detected ***: terminated. The canary never gets a chance to speak. Verify the order yourself before teaching it as "canary catches it" — that's the wrong answer this lab's own materials were rewritten to correct.</a:t>
-            </a:r>
-            <a:endParaRPr lang="en-US" sz="1400" dirty="0"/>
-          </a:p>
-        </p:txBody>
-      </p:sp>
-      <p:sp>
-        <p:nvSpPr>
-          <p:cNvPr id="7" name="Text 4"/>
-          <p:cNvSpPr/>
-          <p:nvPr/>
-        </p:nvSpPr>
-        <p:spPr>
-          <a:xfrm>
-            <a:off x="457200" y="4800600"/>
-            <a:ext cx="6949440" cy="274320"/>
-          </a:xfrm>
-          <a:prstGeom prst="rect">
-            <a:avLst/>
-          </a:prstGeom>
-          <a:noFill/>
-          <a:ln/>
-        </p:spPr>
-        <p:txBody>
-          <a:bodyPr wrap="square" lIns="0" tIns="0" rIns="0" bIns="0" rtlCol="0" anchor="ctr"/>
-          <a:lstStyle/>
-          <a:p>
-            <a:pPr indent="0" marL="0">
-              <a:buNone/>
-            </a:pPr>
-            <a:r>
-              <a:rPr lang="en-US" sz="900" dirty="0">
-                <a:solidFill>
-                  <a:srgbClr val="64748B"/>
-                </a:solidFill>
-                <a:latin typeface="Calibri" pitchFamily="34" charset="0"/>
-                <a:ea typeface="Calibri" pitchFamily="34" charset="-122"/>
-                <a:cs typeface="Calibri" pitchFamily="34" charset="-120"/>
-              </a:rPr>
               <a:t>Software Security · Week 11</a:t>
             </a:r>
             <a:endParaRPr lang="en-US" sz="900" dirty="0"/>
@@ -6220,7 +7418,7 @@
       </p:sp>
       <p:pic>
         <p:nvPicPr>
-          <p:cNvPr id="8" name="Image 1" descr="/private/tmp/claude-501/-Users-pop7-Library-CloudStorage-OneDrive-MonsterConnectCo--Ltd-Lecture-KOSEN69---software-security/e6d6556f-17de-403d-a9a0-cf2f846149b4/scratchpad/tree/slides/pptx/assets/logo-small.png">    </p:cNvPr>
+          <p:cNvPr id="10" name="Image 1" descr="/private/tmp/claude-501/-Users-pop7-Library-CloudStorage-OneDrive-MonsterConnectCo--Ltd-Lecture-KOSEN69---software-security/2a5e410a-41e6-41b1-93e2-54cd05af23b3/scratchpad/KOSEN69 - software-security/slides/pptx/assets/logo-small.png">    </p:cNvPr>
           <p:cNvPicPr>
             <a:picLocks noChangeAspect="1"/>
           </p:cNvPicPr>
@@ -6358,7 +7556,7 @@
                 <a:ea typeface="Arial" pitchFamily="34" charset="-122"/>
                 <a:cs typeface="Arial" pitchFamily="34" charset="-120"/>
               </a:rPr>
-              <a:t>From strcpy to shell — where each mitigation cuts the chain</a:t>
+              <a:t>Fuzzing — how bugs are found today (cont.)</a:t>
             </a:r>
             <a:endParaRPr lang="en-US" sz="2600" dirty="0"/>
           </a:p>
@@ -6366,7 +7564,7 @@
       </p:sp>
       <p:pic>
         <p:nvPicPr>
-          <p:cNvPr id="5" name="Image 1" descr="A vertical attack chain from fuzzing finding the crash, to the unchecked strcpy overflow, to the overwritten return address, to a ret2win shell. Three mitigations cut this chain at different links: FORTIFY_SOURCE aborts at copy time, before any overwrite — this hardened build traps here, which students often misread as the canary. The stack canary only detects the smash at return, after the copy already happened. ASLR/PIE randomizes addresses so the fixed win() address is wrong. NX/DEP stops the OTHER exploitation path (injected shellcode), not this one.">    </p:cNvPr>
+          <p:cNvPr id="5" name="Image 1" descr="Coverage-guided fuzzing as a feedback loop. The top row runs seed corpus → mutate (flip/splice bytes) → run target → &quot;what happened?&quot;, which asks two questions. First: did the input reach NEW code? If yes it's kept and added to the corpus, and a dashed arrow feeds back to mutate — this is the coverage-guided loop that lets the fuzzer learn its way to deep bugs instead of guessing blindly. Second: did it crash? If yes, AddressSanitizer turns a silent memory corruption into a precise report naming the faulting line, and the crashing input is minimized and saved as crash-&lt;hash&gt;. Two notes: coverage guidance reaches bugs a random generator never would, and ASan turns a mystery segfault into an actionable root cause. This is round 1 of the lab — finding the crash, not exploiting it.">    </p:cNvPr>
           <p:cNvPicPr>
             <a:picLocks noChangeAspect="1"/>
           </p:cNvPicPr>
@@ -6380,8 +7578,8 @@
         </p:blipFill>
         <p:spPr>
           <a:xfrm>
-            <a:off x="2627264" y="1097280"/>
-            <a:ext cx="3889472" cy="3566160"/>
+            <a:off x="1514199" y="1097280"/>
+            <a:ext cx="6115601" cy="3566160"/>
           </a:xfrm>
           <a:prstGeom prst="rect">
             <a:avLst/>
@@ -6429,7 +7627,7 @@
       </p:sp>
       <p:pic>
         <p:nvPicPr>
-          <p:cNvPr id="7" name="Image 2" descr="/private/tmp/claude-501/-Users-pop7-Library-CloudStorage-OneDrive-MonsterConnectCo--Ltd-Lecture-KOSEN69---software-security/e6d6556f-17de-403d-a9a0-cf2f846149b4/scratchpad/tree/slides/pptx/assets/logo-small.png">    </p:cNvPr>
+          <p:cNvPr id="7" name="Image 2" descr="/private/tmp/claude-501/-Users-pop7-Library-CloudStorage-OneDrive-MonsterConnectCo--Ltd-Lecture-KOSEN69---software-security/2a5e410a-41e6-41b1-93e2-54cd05af23b3/scratchpad/KOSEN69 - software-security/slides/pptx/assets/logo-small.png">    </p:cNvPr>
           <p:cNvPicPr>
             <a:picLocks noChangeAspect="1"/>
           </p:cNvPicPr>
